--- a/Tp3/Ejercicio_6_Presentacion.pptx
+++ b/Tp3/Ejercicio_6_Presentacion.pptx
@@ -306,7 +306,7 @@
           <a:p>
             <a:fld id="{5BCAD085-E8A6-8845-BD4E-CB4CCA059FC4}" type="datetimeFigureOut">
               <a:rPr lang="en-US" smtClean="0"/>
-              <a:t>3/27/2026</a:t>
+              <a:t>3/30/2026</a:t>
             </a:fld>
             <a:endParaRPr lang="en-US"/>
           </a:p>
@@ -474,7 +474,7 @@
           <a:p>
             <a:fld id="{5BCAD085-E8A6-8845-BD4E-CB4CCA059FC4}" type="datetimeFigureOut">
               <a:rPr lang="en-US" smtClean="0"/>
-              <a:t>3/27/2026</a:t>
+              <a:t>3/30/2026</a:t>
             </a:fld>
             <a:endParaRPr lang="en-US"/>
           </a:p>
@@ -652,7 +652,7 @@
           <a:p>
             <a:fld id="{5BCAD085-E8A6-8845-BD4E-CB4CCA059FC4}" type="datetimeFigureOut">
               <a:rPr lang="en-US" smtClean="0"/>
-              <a:t>3/27/2026</a:t>
+              <a:t>3/30/2026</a:t>
             </a:fld>
             <a:endParaRPr lang="en-US"/>
           </a:p>
@@ -820,7 +820,7 @@
           <a:p>
             <a:fld id="{5BCAD085-E8A6-8845-BD4E-CB4CCA059FC4}" type="datetimeFigureOut">
               <a:rPr lang="en-US" smtClean="0"/>
-              <a:t>3/27/2026</a:t>
+              <a:t>3/30/2026</a:t>
             </a:fld>
             <a:endParaRPr lang="en-US"/>
           </a:p>
@@ -1065,7 +1065,7 @@
           <a:p>
             <a:fld id="{5BCAD085-E8A6-8845-BD4E-CB4CCA059FC4}" type="datetimeFigureOut">
               <a:rPr lang="en-US" smtClean="0"/>
-              <a:t>3/27/2026</a:t>
+              <a:t>3/30/2026</a:t>
             </a:fld>
             <a:endParaRPr lang="en-US"/>
           </a:p>
@@ -1350,7 +1350,7 @@
           <a:p>
             <a:fld id="{5BCAD085-E8A6-8845-BD4E-CB4CCA059FC4}" type="datetimeFigureOut">
               <a:rPr lang="en-US" smtClean="0"/>
-              <a:t>3/27/2026</a:t>
+              <a:t>3/30/2026</a:t>
             </a:fld>
             <a:endParaRPr lang="en-US"/>
           </a:p>
@@ -1769,7 +1769,7 @@
           <a:p>
             <a:fld id="{5BCAD085-E8A6-8845-BD4E-CB4CCA059FC4}" type="datetimeFigureOut">
               <a:rPr lang="en-US" smtClean="0"/>
-              <a:t>3/27/2026</a:t>
+              <a:t>3/30/2026</a:t>
             </a:fld>
             <a:endParaRPr lang="en-US"/>
           </a:p>
@@ -1886,7 +1886,7 @@
           <a:p>
             <a:fld id="{5BCAD085-E8A6-8845-BD4E-CB4CCA059FC4}" type="datetimeFigureOut">
               <a:rPr lang="en-US" smtClean="0"/>
-              <a:t>3/27/2026</a:t>
+              <a:t>3/30/2026</a:t>
             </a:fld>
             <a:endParaRPr lang="en-US"/>
           </a:p>
@@ -1981,7 +1981,7 @@
           <a:p>
             <a:fld id="{5BCAD085-E8A6-8845-BD4E-CB4CCA059FC4}" type="datetimeFigureOut">
               <a:rPr lang="en-US" smtClean="0"/>
-              <a:t>3/27/2026</a:t>
+              <a:t>3/30/2026</a:t>
             </a:fld>
             <a:endParaRPr lang="en-US"/>
           </a:p>
@@ -2256,7 +2256,7 @@
           <a:p>
             <a:fld id="{5BCAD085-E8A6-8845-BD4E-CB4CCA059FC4}" type="datetimeFigureOut">
               <a:rPr lang="en-US" smtClean="0"/>
-              <a:t>3/27/2026</a:t>
+              <a:t>3/30/2026</a:t>
             </a:fld>
             <a:endParaRPr lang="en-US"/>
           </a:p>
@@ -2508,7 +2508,7 @@
           <a:p>
             <a:fld id="{5BCAD085-E8A6-8845-BD4E-CB4CCA059FC4}" type="datetimeFigureOut">
               <a:rPr lang="en-US" smtClean="0"/>
-              <a:t>3/27/2026</a:t>
+              <a:t>3/30/2026</a:t>
             </a:fld>
             <a:endParaRPr lang="en-US"/>
           </a:p>
@@ -2719,7 +2719,7 @@
           <a:p>
             <a:fld id="{5BCAD085-E8A6-8845-BD4E-CB4CCA059FC4}" type="datetimeFigureOut">
               <a:rPr lang="en-US" smtClean="0"/>
-              <a:t>3/27/2026</a:t>
+              <a:t>3/30/2026</a:t>
             </a:fld>
             <a:endParaRPr lang="en-US"/>
           </a:p>
@@ -3583,7 +3583,7 @@
         <p:spPr>
           <a:xfrm>
             <a:off x="548640" y="1554480"/>
-            <a:ext cx="11064240" cy="2743200"/>
+            <a:ext cx="11064240" cy="4170372"/>
           </a:xfrm>
           <a:prstGeom prst="rect">
             <a:avLst/>
@@ -3598,17 +3598,401 @@
           <a:p>
             <a:pPr algn="l"/>
             <a:r>
-              <a:rPr sz="1700" b="0" i="0">
+              <a:rPr lang="es-AR" sz="1700" b="0" i="0" dirty="0">
                 <a:solidFill>
                   <a:srgbClr val="FFFFFF"/>
                 </a:solidFill>
               </a:rPr>
-              <a:t>Si. El programa levanta una excepcion a la vez con feraiseexcept() y la imprime
-inmediatamente con show_fe_exceptions().
+              <a:t>Si. El programa levanta una excepción a la vez con </a:t>
+            </a:r>
+            <a:r>
+              <a:rPr lang="es-AR" sz="1700" b="0" i="0" dirty="0" err="1">
+                <a:solidFill>
+                  <a:srgbClr val="FFFFFF"/>
+                </a:solidFill>
+              </a:rPr>
+              <a:t>feraiseexcept</a:t>
+            </a:r>
+            <a:r>
+              <a:rPr lang="es-AR" sz="1700" b="0" i="0" dirty="0">
+                <a:solidFill>
+                  <a:srgbClr val="FFFFFF"/>
+                </a:solidFill>
+              </a:rPr>
+              <a:t>() y la imprime
+inmediatamente con </a:t>
+            </a:r>
+            <a:r>
+              <a:rPr lang="es-AR" sz="1700" b="0" i="0" dirty="0" err="1">
+                <a:solidFill>
+                  <a:srgbClr val="FFFFFF"/>
+                </a:solidFill>
+              </a:rPr>
+              <a:t>show_fe_exceptions</a:t>
+            </a:r>
+            <a:r>
+              <a:rPr lang="es-AR" sz="1700" b="0" i="0" dirty="0">
+                <a:solidFill>
+                  <a:srgbClr val="FFFFFF"/>
+                </a:solidFill>
+              </a:rPr>
+              <a:t>().</a:t>
+            </a:r>
+          </a:p>
+          <a:p>
+            <a:pPr algn="l"/>
+            <a:endParaRPr lang="es-AR" sz="1700" b="0" i="0" dirty="0">
+              <a:solidFill>
+                <a:srgbClr val="FFFFFF"/>
+              </a:solidFill>
+            </a:endParaRPr>
+          </a:p>
+          <a:p>
+            <a:r>
+              <a:rPr lang="es-AR" sz="1600" dirty="0">
+                <a:solidFill>
+                  <a:srgbClr val="A6E22E"/>
+                </a:solidFill>
+                <a:latin typeface="Consolas" panose="020B0609020204030204" pitchFamily="49" charset="0"/>
+              </a:rPr>
+              <a:t>  </a:t>
+            </a:r>
+            <a:r>
+              <a:rPr lang="es-AR" sz="1600" b="0" dirty="0" err="1">
+                <a:solidFill>
+                  <a:srgbClr val="A6E22E"/>
+                </a:solidFill>
+                <a:effectLst/>
+                <a:latin typeface="Consolas" panose="020B0609020204030204" pitchFamily="49" charset="0"/>
+              </a:rPr>
+              <a:t>feraiseexcept</a:t>
+            </a:r>
+            <a:r>
+              <a:rPr lang="es-AR" sz="1600" b="0" dirty="0">
+                <a:solidFill>
+                  <a:srgbClr val="F8F8F2"/>
+                </a:solidFill>
+                <a:effectLst/>
+                <a:latin typeface="Consolas" panose="020B0609020204030204" pitchFamily="49" charset="0"/>
+              </a:rPr>
+              <a:t>(FE_INVALID);</a:t>
+            </a:r>
+          </a:p>
+          <a:p>
+            <a:r>
+              <a:rPr lang="es-AR" sz="1600" b="0" dirty="0">
+                <a:solidFill>
+                  <a:srgbClr val="F8F8F2"/>
+                </a:solidFill>
+                <a:effectLst/>
+                <a:latin typeface="Consolas" panose="020B0609020204030204" pitchFamily="49" charset="0"/>
+              </a:rPr>
+              <a:t>  </a:t>
+            </a:r>
+            <a:r>
+              <a:rPr lang="es-AR" sz="1600" b="0" dirty="0" err="1">
+                <a:solidFill>
+                  <a:srgbClr val="A6E22E"/>
+                </a:solidFill>
+                <a:effectLst/>
+                <a:latin typeface="Consolas" panose="020B0609020204030204" pitchFamily="49" charset="0"/>
+              </a:rPr>
+              <a:t>show_fe_exceptions</a:t>
+            </a:r>
+            <a:r>
+              <a:rPr lang="es-AR" sz="1600" b="0" dirty="0">
+                <a:solidFill>
+                  <a:srgbClr val="F8F8F2"/>
+                </a:solidFill>
+                <a:effectLst/>
+                <a:latin typeface="Consolas" panose="020B0609020204030204" pitchFamily="49" charset="0"/>
+              </a:rPr>
+              <a:t>();</a:t>
+            </a:r>
+          </a:p>
+          <a:p>
+            <a:br>
+              <a:rPr lang="es-AR" sz="1600" b="0" dirty="0">
+                <a:solidFill>
+                  <a:srgbClr val="F8F8F2"/>
+                </a:solidFill>
+                <a:effectLst/>
+                <a:latin typeface="Consolas" panose="020B0609020204030204" pitchFamily="49" charset="0"/>
+              </a:rPr>
+            </a:br>
+            <a:r>
+              <a:rPr lang="es-AR" sz="1600" b="0" dirty="0">
+                <a:solidFill>
+                  <a:srgbClr val="F8F8F2"/>
+                </a:solidFill>
+                <a:effectLst/>
+                <a:latin typeface="Consolas" panose="020B0609020204030204" pitchFamily="49" charset="0"/>
+              </a:rPr>
+              <a:t>  </a:t>
+            </a:r>
+            <a:r>
+              <a:rPr lang="es-AR" sz="1600" b="0" dirty="0">
+                <a:solidFill>
+                  <a:srgbClr val="88846F"/>
+                </a:solidFill>
+                <a:effectLst/>
+                <a:latin typeface="Consolas" panose="020B0609020204030204" pitchFamily="49" charset="0"/>
+              </a:rPr>
+              <a:t>//~ /* </a:t>
+            </a:r>
+            <a:r>
+              <a:rPr lang="es-AR" sz="1600" b="0" dirty="0" err="1">
+                <a:solidFill>
+                  <a:srgbClr val="88846F"/>
+                </a:solidFill>
+                <a:effectLst/>
+                <a:latin typeface="Consolas" panose="020B0609020204030204" pitchFamily="49" charset="0"/>
+              </a:rPr>
+              <a:t>Temporarily</a:t>
+            </a:r>
+            <a:r>
+              <a:rPr lang="es-AR" sz="1600" b="0" dirty="0">
+                <a:solidFill>
+                  <a:srgbClr val="88846F"/>
+                </a:solidFill>
+                <a:effectLst/>
+                <a:latin typeface="Consolas" panose="020B0609020204030204" pitchFamily="49" charset="0"/>
+              </a:rPr>
+              <a:t> </a:t>
+            </a:r>
+            <a:r>
+              <a:rPr lang="es-AR" sz="1600" b="0" dirty="0" err="1">
+                <a:solidFill>
+                  <a:srgbClr val="88846F"/>
+                </a:solidFill>
+                <a:effectLst/>
+                <a:latin typeface="Consolas" panose="020B0609020204030204" pitchFamily="49" charset="0"/>
+              </a:rPr>
+              <a:t>raise</a:t>
+            </a:r>
+            <a:r>
+              <a:rPr lang="es-AR" sz="1600" b="0" dirty="0">
+                <a:solidFill>
+                  <a:srgbClr val="88846F"/>
+                </a:solidFill>
+                <a:effectLst/>
+                <a:latin typeface="Consolas" panose="020B0609020204030204" pitchFamily="49" charset="0"/>
+              </a:rPr>
+              <a:t> </a:t>
+            </a:r>
+            <a:r>
+              <a:rPr lang="es-AR" sz="1600" b="0" dirty="0" err="1">
+                <a:solidFill>
+                  <a:srgbClr val="88846F"/>
+                </a:solidFill>
+                <a:effectLst/>
+                <a:latin typeface="Consolas" panose="020B0609020204030204" pitchFamily="49" charset="0"/>
+              </a:rPr>
+              <a:t>two</a:t>
+            </a:r>
+            <a:r>
+              <a:rPr lang="es-AR" sz="1600" b="0" dirty="0">
+                <a:solidFill>
+                  <a:srgbClr val="88846F"/>
+                </a:solidFill>
+                <a:effectLst/>
+                <a:latin typeface="Consolas" panose="020B0609020204030204" pitchFamily="49" charset="0"/>
+              </a:rPr>
+              <a:t> </a:t>
+            </a:r>
+            <a:r>
+              <a:rPr lang="es-AR" sz="1600" b="0" dirty="0" err="1">
+                <a:solidFill>
+                  <a:srgbClr val="88846F"/>
+                </a:solidFill>
+                <a:effectLst/>
+                <a:latin typeface="Consolas" panose="020B0609020204030204" pitchFamily="49" charset="0"/>
+              </a:rPr>
+              <a:t>other</a:t>
+            </a:r>
+            <a:r>
+              <a:rPr lang="es-AR" sz="1600" b="0" dirty="0">
+                <a:solidFill>
+                  <a:srgbClr val="88846F"/>
+                </a:solidFill>
+                <a:effectLst/>
+                <a:latin typeface="Consolas" panose="020B0609020204030204" pitchFamily="49" charset="0"/>
+              </a:rPr>
+              <a:t> </a:t>
+            </a:r>
+            <a:r>
+              <a:rPr lang="es-AR" sz="1600" b="0" dirty="0" err="1">
+                <a:solidFill>
+                  <a:srgbClr val="88846F"/>
+                </a:solidFill>
+                <a:effectLst/>
+                <a:latin typeface="Consolas" panose="020B0609020204030204" pitchFamily="49" charset="0"/>
+              </a:rPr>
+              <a:t>exceptions</a:t>
+            </a:r>
+            <a:r>
+              <a:rPr lang="es-AR" sz="1600" b="0" dirty="0">
+                <a:solidFill>
+                  <a:srgbClr val="88846F"/>
+                </a:solidFill>
+                <a:effectLst/>
+                <a:latin typeface="Consolas" panose="020B0609020204030204" pitchFamily="49" charset="0"/>
+              </a:rPr>
+              <a:t>. */</a:t>
+            </a:r>
+            <a:endParaRPr lang="es-AR" sz="1600" b="0" dirty="0">
+              <a:solidFill>
+                <a:srgbClr val="F8F8F2"/>
+              </a:solidFill>
+              <a:effectLst/>
+              <a:latin typeface="Consolas" panose="020B0609020204030204" pitchFamily="49" charset="0"/>
+            </a:endParaRPr>
+          </a:p>
+          <a:p>
+            <a:r>
+              <a:rPr lang="es-AR" sz="1600" b="0" dirty="0">
+                <a:solidFill>
+                  <a:srgbClr val="F8F8F2"/>
+                </a:solidFill>
+                <a:effectLst/>
+                <a:latin typeface="Consolas" panose="020B0609020204030204" pitchFamily="49" charset="0"/>
+              </a:rPr>
+              <a:t>  </a:t>
+            </a:r>
+            <a:r>
+              <a:rPr lang="es-AR" sz="1600" b="0" dirty="0" err="1">
+                <a:solidFill>
+                  <a:srgbClr val="A6E22E"/>
+                </a:solidFill>
+                <a:effectLst/>
+                <a:latin typeface="Consolas" panose="020B0609020204030204" pitchFamily="49" charset="0"/>
+              </a:rPr>
+              <a:t>feclearexcept</a:t>
+            </a:r>
+            <a:r>
+              <a:rPr lang="es-AR" sz="1600" b="0" dirty="0">
+                <a:solidFill>
+                  <a:srgbClr val="F8F8F2"/>
+                </a:solidFill>
+                <a:effectLst/>
+                <a:latin typeface="Consolas" panose="020B0609020204030204" pitchFamily="49" charset="0"/>
+              </a:rPr>
+              <a:t>(FE_ALL_EXCEPT);</a:t>
+            </a:r>
+          </a:p>
+          <a:p>
+            <a:r>
+              <a:rPr lang="es-AR" sz="1600" b="0" dirty="0">
+                <a:solidFill>
+                  <a:srgbClr val="F8F8F2"/>
+                </a:solidFill>
+                <a:effectLst/>
+                <a:latin typeface="Consolas" panose="020B0609020204030204" pitchFamily="49" charset="0"/>
+              </a:rPr>
+              <a:t>  </a:t>
+            </a:r>
+            <a:r>
+              <a:rPr lang="es-AR" sz="1600" b="0" dirty="0" err="1">
+                <a:solidFill>
+                  <a:srgbClr val="A6E22E"/>
+                </a:solidFill>
+                <a:effectLst/>
+                <a:latin typeface="Consolas" panose="020B0609020204030204" pitchFamily="49" charset="0"/>
+              </a:rPr>
+              <a:t>feraiseexcept</a:t>
+            </a:r>
+            <a:r>
+              <a:rPr lang="es-AR" sz="1600" b="0" dirty="0">
+                <a:solidFill>
+                  <a:srgbClr val="F8F8F2"/>
+                </a:solidFill>
+                <a:effectLst/>
+                <a:latin typeface="Consolas" panose="020B0609020204030204" pitchFamily="49" charset="0"/>
+              </a:rPr>
+              <a:t>(FE_OVERFLOW </a:t>
+            </a:r>
+            <a:r>
+              <a:rPr lang="es-AR" sz="1600" b="0" dirty="0">
+                <a:solidFill>
+                  <a:srgbClr val="F92672"/>
+                </a:solidFill>
+                <a:effectLst/>
+                <a:latin typeface="Consolas" panose="020B0609020204030204" pitchFamily="49" charset="0"/>
+              </a:rPr>
+              <a:t>|</a:t>
+            </a:r>
+            <a:r>
+              <a:rPr lang="es-AR" sz="1600" b="0" dirty="0">
+                <a:solidFill>
+                  <a:srgbClr val="F8F8F2"/>
+                </a:solidFill>
+                <a:effectLst/>
+                <a:latin typeface="Consolas" panose="020B0609020204030204" pitchFamily="49" charset="0"/>
+              </a:rPr>
+              <a:t> FE_INEXACT);</a:t>
+            </a:r>
+          </a:p>
+          <a:p>
+            <a:r>
+              <a:rPr lang="es-AR" sz="1600" b="0" dirty="0">
+                <a:solidFill>
+                  <a:srgbClr val="F8F8F2"/>
+                </a:solidFill>
+                <a:effectLst/>
+                <a:latin typeface="Consolas" panose="020B0609020204030204" pitchFamily="49" charset="0"/>
+              </a:rPr>
+              <a:t>  </a:t>
+            </a:r>
+            <a:r>
+              <a:rPr lang="es-AR" sz="1600" b="0" dirty="0" err="1">
+                <a:solidFill>
+                  <a:srgbClr val="A6E22E"/>
+                </a:solidFill>
+                <a:effectLst/>
+                <a:latin typeface="Consolas" panose="020B0609020204030204" pitchFamily="49" charset="0"/>
+              </a:rPr>
+              <a:t>show_fe_exceptions</a:t>
+            </a:r>
+            <a:r>
+              <a:rPr lang="es-AR" sz="1600" b="0" dirty="0">
+                <a:solidFill>
+                  <a:srgbClr val="F8F8F2"/>
+                </a:solidFill>
+                <a:effectLst/>
+                <a:latin typeface="Consolas" panose="020B0609020204030204" pitchFamily="49" charset="0"/>
+              </a:rPr>
+              <a:t>();</a:t>
+            </a:r>
+          </a:p>
+          <a:p>
+            <a:pPr algn="l"/>
+            <a:r>
+              <a:rPr lang="es-AR" sz="1700" b="0" i="0" dirty="0">
+                <a:solidFill>
+                  <a:srgbClr val="FFFFFF"/>
+                </a:solidFill>
+              </a:rPr>
+              <a:t>
 En el primer bloque se levanta FE_INVALID -&gt; aparece en pantalla.
-En el segundo bloque, despues de limpiar con feclearexcept(), se levantan FE_OVERFLOW
-y FE_INEXACT simultaneamente -&gt; ambas aparecen juntas en consola.
-El resultado es totalmente consistente con las instrucciones del codigo.</a:t>
+En el segundo bloque, después de limpiar con </a:t>
+            </a:r>
+            <a:r>
+              <a:rPr lang="es-AR" sz="1700" b="0" i="0" dirty="0" err="1">
+                <a:solidFill>
+                  <a:srgbClr val="FFFFFF"/>
+                </a:solidFill>
+              </a:rPr>
+              <a:t>feclearexcept</a:t>
+            </a:r>
+            <a:r>
+              <a:rPr lang="es-AR" sz="1700" b="0" i="0" dirty="0">
+                <a:solidFill>
+                  <a:srgbClr val="FFFFFF"/>
+                </a:solidFill>
+              </a:rPr>
+              <a:t>(), se levantan FE_OVERFLOW
+y FE_INEXACT simultáneamente -&gt; ambas aparecen juntas en consola.
+El resultado es totalmente consistente con las instrucciones del código.</a:t>
             </a:r>
           </a:p>
         </p:txBody>
@@ -3621,7 +4005,7 @@
         </p:nvSpPr>
         <p:spPr>
           <a:xfrm>
-            <a:off x="2011680" y="4480560"/>
+            <a:off x="1629940" y="5728317"/>
             <a:ext cx="8138160" cy="914400"/>
           </a:xfrm>
           <a:prstGeom prst="rect">
@@ -3665,7 +4049,7 @@
         </p:nvSpPr>
         <p:spPr>
           <a:xfrm>
-            <a:off x="2176272" y="4617720"/>
+            <a:off x="1794532" y="5865477"/>
             <a:ext cx="7808976" cy="640080"/>
           </a:xfrm>
           <a:prstGeom prst="rect">
@@ -3680,7 +4064,7 @@
           <a:lstStyle/>
           <a:p>
             <a:r>
-              <a:rPr sz="1300">
+              <a:rPr sz="1300" dirty="0">
                 <a:solidFill>
                   <a:srgbClr val="A6E3A1"/>
                 </a:solidFill>
@@ -3890,7 +4274,7 @@
         <p:spPr>
           <a:xfrm>
             <a:off x="548640" y="1554480"/>
-            <a:ext cx="11064240" cy="2743200"/>
+            <a:ext cx="11064240" cy="2939266"/>
           </a:xfrm>
           <a:prstGeom prst="rect">
             <a:avLst/>
@@ -3905,17 +4289,228 @@
           <a:p>
             <a:pPr algn="l"/>
             <a:r>
-              <a:rPr sz="1700" b="0" i="0">
+              <a:rPr lang="es-AR" sz="1700" b="0" i="0" dirty="0">
                 <a:solidFill>
                   <a:srgbClr val="FFFFFF"/>
                 </a:solidFill>
               </a:rPr>
-              <a:t>Al activar feenableexcept(FE_ALL_EXCEPT) sin un handler instalado,
-el programa termina de forma abrupta con exit code 136.
-El codigo 136 corresponde a SIGFPE (Floating Point Exception).
-feenableexcept() le ordena al hardware que emita una interrupcion activa (SIGFPE)
-cada vez que ocurre un error de punto flotante. Como no hay ningun handler
-registrado para capturar esa senal, el sistema operativo mata el proceso.</a:t>
+              <a:t>Al activar </a:t>
+            </a:r>
+            <a:r>
+              <a:rPr lang="es-AR" sz="1700" b="0" i="0" dirty="0" err="1">
+                <a:solidFill>
+                  <a:srgbClr val="FFFFFF"/>
+                </a:solidFill>
+              </a:rPr>
+              <a:t>feenableexcept</a:t>
+            </a:r>
+            <a:r>
+              <a:rPr lang="es-AR" sz="1700" b="0" i="0" dirty="0">
+                <a:solidFill>
+                  <a:srgbClr val="FFFFFF"/>
+                </a:solidFill>
+              </a:rPr>
+              <a:t>(FE_ALL_EXCEPT) sin un </a:t>
+            </a:r>
+            <a:r>
+              <a:rPr lang="es-AR" sz="1700" b="0" i="0" dirty="0" err="1">
+                <a:solidFill>
+                  <a:srgbClr val="FFFFFF"/>
+                </a:solidFill>
+              </a:rPr>
+              <a:t>handler</a:t>
+            </a:r>
+            <a:r>
+              <a:rPr lang="es-AR" sz="1700" b="0" i="0" dirty="0">
+                <a:solidFill>
+                  <a:srgbClr val="FFFFFF"/>
+                </a:solidFill>
+              </a:rPr>
+              <a:t> instalado,
+el programa termina de forma abrupta con </a:t>
+            </a:r>
+            <a:r>
+              <a:rPr lang="es-AR" sz="1700" b="0" i="0" dirty="0" err="1">
+                <a:solidFill>
+                  <a:srgbClr val="FFFFFF"/>
+                </a:solidFill>
+              </a:rPr>
+              <a:t>exit</a:t>
+            </a:r>
+            <a:r>
+              <a:rPr lang="es-AR" sz="1700" b="0" i="0" dirty="0">
+                <a:solidFill>
+                  <a:srgbClr val="FFFFFF"/>
+                </a:solidFill>
+              </a:rPr>
+              <a:t> </a:t>
+            </a:r>
+            <a:r>
+              <a:rPr lang="es-AR" sz="1700" b="0" i="0" dirty="0" err="1">
+                <a:solidFill>
+                  <a:srgbClr val="FFFFFF"/>
+                </a:solidFill>
+              </a:rPr>
+              <a:t>code</a:t>
+            </a:r>
+            <a:r>
+              <a:rPr lang="es-AR" sz="1700" b="0" i="0" dirty="0">
+                <a:solidFill>
+                  <a:srgbClr val="FFFFFF"/>
+                </a:solidFill>
+              </a:rPr>
+              <a:t> 136.</a:t>
+            </a:r>
+          </a:p>
+          <a:p>
+            <a:pPr algn="l"/>
+            <a:endParaRPr lang="es-AR" sz="1700" b="0" i="0" dirty="0">
+              <a:solidFill>
+                <a:srgbClr val="FFFFFF"/>
+              </a:solidFill>
+            </a:endParaRPr>
+          </a:p>
+          <a:p>
+            <a:r>
+              <a:rPr lang="es-AR" sz="1600" b="0" dirty="0">
+                <a:solidFill>
+                  <a:srgbClr val="F8F8F2"/>
+                </a:solidFill>
+                <a:effectLst/>
+                <a:latin typeface="Consolas" panose="020B0609020204030204" pitchFamily="49" charset="0"/>
+              </a:rPr>
+              <a:t>  </a:t>
+            </a:r>
+            <a:r>
+              <a:rPr lang="es-AR" sz="1600" b="0" dirty="0" err="1">
+                <a:solidFill>
+                  <a:srgbClr val="A6E22E"/>
+                </a:solidFill>
+                <a:effectLst/>
+                <a:latin typeface="Consolas" panose="020B0609020204030204" pitchFamily="49" charset="0"/>
+              </a:rPr>
+              <a:t>feclearexcept</a:t>
+            </a:r>
+            <a:r>
+              <a:rPr lang="es-AR" sz="1600" b="0" dirty="0">
+                <a:solidFill>
+                  <a:srgbClr val="F8F8F2"/>
+                </a:solidFill>
+                <a:effectLst/>
+                <a:latin typeface="Consolas" panose="020B0609020204030204" pitchFamily="49" charset="0"/>
+              </a:rPr>
+              <a:t> (FE_ALL_EXCEPT);</a:t>
+            </a:r>
+          </a:p>
+          <a:p>
+            <a:r>
+              <a:rPr lang="es-AR" sz="1600" b="0" dirty="0">
+                <a:solidFill>
+                  <a:srgbClr val="F8F8F2"/>
+                </a:solidFill>
+                <a:effectLst/>
+                <a:latin typeface="Consolas" panose="020B0609020204030204" pitchFamily="49" charset="0"/>
+              </a:rPr>
+              <a:t>  </a:t>
+            </a:r>
+            <a:r>
+              <a:rPr lang="es-AR" sz="1600" b="0" dirty="0" err="1">
+                <a:solidFill>
+                  <a:srgbClr val="A6E22E"/>
+                </a:solidFill>
+                <a:effectLst/>
+                <a:latin typeface="Consolas" panose="020B0609020204030204" pitchFamily="49" charset="0"/>
+              </a:rPr>
+              <a:t>feenableexcept</a:t>
+            </a:r>
+            <a:r>
+              <a:rPr lang="es-AR" sz="1600" b="0" dirty="0">
+                <a:solidFill>
+                  <a:srgbClr val="F8F8F2"/>
+                </a:solidFill>
+                <a:effectLst/>
+                <a:latin typeface="Consolas" panose="020B0609020204030204" pitchFamily="49" charset="0"/>
+              </a:rPr>
+              <a:t>(FE_ALL_EXCEPT); </a:t>
+            </a:r>
+          </a:p>
+          <a:p>
+            <a:pPr algn="l"/>
+            <a:r>
+              <a:rPr lang="es-AR" sz="1700" b="0" i="0" dirty="0">
+                <a:solidFill>
+                  <a:srgbClr val="FFFFFF"/>
+                </a:solidFill>
+              </a:rPr>
+              <a:t>
+El código 136 corresponde a SIGFPE (</a:t>
+            </a:r>
+            <a:r>
+              <a:rPr lang="es-AR" sz="1700" b="0" i="0" dirty="0" err="1">
+                <a:solidFill>
+                  <a:srgbClr val="FFFFFF"/>
+                </a:solidFill>
+              </a:rPr>
+              <a:t>Floating</a:t>
+            </a:r>
+            <a:r>
+              <a:rPr lang="es-AR" sz="1700" b="0" i="0" dirty="0">
+                <a:solidFill>
+                  <a:srgbClr val="FFFFFF"/>
+                </a:solidFill>
+              </a:rPr>
+              <a:t> Point </a:t>
+            </a:r>
+            <a:r>
+              <a:rPr lang="es-AR" sz="1700" b="0" i="0" dirty="0" err="1">
+                <a:solidFill>
+                  <a:srgbClr val="FFFFFF"/>
+                </a:solidFill>
+              </a:rPr>
+              <a:t>Exception</a:t>
+            </a:r>
+            <a:r>
+              <a:rPr lang="es-AR" sz="1700" b="0" i="0" dirty="0">
+                <a:solidFill>
+                  <a:srgbClr val="FFFFFF"/>
+                </a:solidFill>
+              </a:rPr>
+              <a:t>).
+</a:t>
+            </a:r>
+            <a:r>
+              <a:rPr lang="es-AR" sz="1700" b="0" i="0" dirty="0" err="1">
+                <a:solidFill>
+                  <a:srgbClr val="FFFFFF"/>
+                </a:solidFill>
+              </a:rPr>
+              <a:t>feenableexcept</a:t>
+            </a:r>
+            <a:r>
+              <a:rPr lang="es-AR" sz="1700" b="0" i="0" dirty="0">
+                <a:solidFill>
+                  <a:srgbClr val="FFFFFF"/>
+                </a:solidFill>
+              </a:rPr>
+              <a:t>() le ordena al hardware que emita una interrupción activa (SIGFPE)
+cada vez que ocurre un error de punto flotante. Como no hay ningún </a:t>
+            </a:r>
+            <a:r>
+              <a:rPr lang="es-AR" sz="1700" b="0" i="0" dirty="0" err="1">
+                <a:solidFill>
+                  <a:srgbClr val="FFFFFF"/>
+                </a:solidFill>
+              </a:rPr>
+              <a:t>handler</a:t>
+            </a:r>
+            <a:r>
+              <a:rPr lang="es-AR" sz="1700" b="0" i="0" dirty="0">
+                <a:solidFill>
+                  <a:srgbClr val="FFFFFF"/>
+                </a:solidFill>
+              </a:rPr>
+              <a:t>
+registrado para capturar esa señal, el sistema operativo mata el proceso.</a:t>
             </a:r>
           </a:p>
         </p:txBody>
@@ -3928,7 +4523,7 @@
         </p:nvSpPr>
         <p:spPr>
           <a:xfrm>
-            <a:off x="2011680" y="4434840"/>
+            <a:off x="1674329" y="4493746"/>
             <a:ext cx="8138160" cy="822960"/>
           </a:xfrm>
           <a:prstGeom prst="rect">
@@ -3972,7 +4567,7 @@
         </p:nvSpPr>
         <p:spPr>
           <a:xfrm>
-            <a:off x="2176272" y="4572000"/>
+            <a:off x="1838921" y="4630906"/>
             <a:ext cx="7808976" cy="548640"/>
           </a:xfrm>
           <a:prstGeom prst="rect">
@@ -4275,7 +4870,7 @@
         <p:spPr>
           <a:xfrm>
             <a:off x="365760" y="1005840"/>
-            <a:ext cx="11430000" cy="457200"/>
+            <a:ext cx="11430000" cy="369332"/>
           </a:xfrm>
           <a:prstGeom prst="rect">
             <a:avLst/>
@@ -4290,12 +4885,28 @@
           <a:p>
             <a:pPr algn="l"/>
             <a:r>
-              <a:rPr sz="1800" b="1" i="0">
+              <a:rPr lang="es-AR" sz="1800" b="1" i="0" dirty="0">
                 <a:solidFill>
                   <a:srgbClr val="F9E2AF"/>
                 </a:solidFill>
               </a:rPr>
-              <a:t>Que se observa? Cual es el objetivo de signal()?</a:t>
+              <a:t>Que se observa? Cual es el objetivo de </a:t>
+            </a:r>
+            <a:r>
+              <a:rPr lang="es-AR" sz="1800" b="1" i="0" dirty="0" err="1">
+                <a:solidFill>
+                  <a:srgbClr val="F9E2AF"/>
+                </a:solidFill>
+              </a:rPr>
+              <a:t>signal</a:t>
+            </a:r>
+            <a:r>
+              <a:rPr lang="es-AR" sz="1800" b="1" i="0" dirty="0">
+                <a:solidFill>
+                  <a:srgbClr val="F9E2AF"/>
+                </a:solidFill>
+              </a:rPr>
+              <a:t>()?</a:t>
             </a:r>
           </a:p>
         </p:txBody>
@@ -4309,7 +4920,7 @@
         <p:spPr>
           <a:xfrm>
             <a:off x="548640" y="1554480"/>
-            <a:ext cx="11064240" cy="2468880"/>
+            <a:ext cx="11064240" cy="1400383"/>
           </a:xfrm>
           <a:prstGeom prst="rect">
             <a:avLst/>
@@ -4324,15 +4935,127 @@
           <a:p>
             <a:pPr algn="l"/>
             <a:r>
-              <a:rPr sz="1700" b="0" i="0">
+              <a:rPr lang="es-AR" sz="1700" b="0" i="0" dirty="0">
                 <a:solidFill>
                   <a:srgbClr val="FFFFFF"/>
                 </a:solidFill>
               </a:rPr>
-              <a:t>Al registrar fpe_handler con signal(), cuando ocurre la excepcion el sistema
-operativo interrumpe el programa y llama a fpe_handler() en lugar de cerrarlo.
-El programa ya no termina con exit 136 (crash), sino con exit 1 (EXIT_FAILURE),
-porque es el propio codigo quien llama a exit() de forma controlada.</a:t>
+              <a:t>Al registrar </a:t>
+            </a:r>
+            <a:r>
+              <a:rPr lang="es-AR" sz="1700" b="0" i="0" dirty="0" err="1">
+                <a:solidFill>
+                  <a:srgbClr val="FFFFFF"/>
+                </a:solidFill>
+              </a:rPr>
+              <a:t>fpe_handler</a:t>
+            </a:r>
+            <a:r>
+              <a:rPr lang="es-AR" sz="1700" b="0" i="0" dirty="0">
+                <a:solidFill>
+                  <a:srgbClr val="FFFFFF"/>
+                </a:solidFill>
+              </a:rPr>
+              <a:t> con </a:t>
+            </a:r>
+            <a:r>
+              <a:rPr lang="es-AR" sz="1700" b="0" i="0" dirty="0" err="1">
+                <a:solidFill>
+                  <a:srgbClr val="FFFFFF"/>
+                </a:solidFill>
+              </a:rPr>
+              <a:t>signal</a:t>
+            </a:r>
+            <a:r>
+              <a:rPr lang="es-AR" sz="1700" b="0" i="0" dirty="0">
+                <a:solidFill>
+                  <a:srgbClr val="FFFFFF"/>
+                </a:solidFill>
+              </a:rPr>
+              <a:t>(), cuando ocurre la excepción el sistema
+operativo interrumpe el programa y llama a </a:t>
+            </a:r>
+            <a:r>
+              <a:rPr lang="es-AR" sz="1700" b="0" i="0" dirty="0" err="1">
+                <a:solidFill>
+                  <a:srgbClr val="FFFFFF"/>
+                </a:solidFill>
+              </a:rPr>
+              <a:t>fpe_handler</a:t>
+            </a:r>
+            <a:r>
+              <a:rPr lang="es-AR" sz="1700" b="0" i="0" dirty="0">
+                <a:solidFill>
+                  <a:srgbClr val="FFFFFF"/>
+                </a:solidFill>
+              </a:rPr>
+              <a:t>() en lugar de cerrarlo.
+El programa ya no termina con </a:t>
+            </a:r>
+            <a:r>
+              <a:rPr lang="es-AR" sz="1700" b="0" i="0" dirty="0" err="1">
+                <a:solidFill>
+                  <a:srgbClr val="FFFFFF"/>
+                </a:solidFill>
+              </a:rPr>
+              <a:t>exit</a:t>
+            </a:r>
+            <a:r>
+              <a:rPr lang="es-AR" sz="1700" b="0" i="0" dirty="0">
+                <a:solidFill>
+                  <a:srgbClr val="FFFFFF"/>
+                </a:solidFill>
+              </a:rPr>
+              <a:t> 136 (</a:t>
+            </a:r>
+            <a:r>
+              <a:rPr lang="es-AR" sz="1700" b="0" i="0" dirty="0" err="1">
+                <a:solidFill>
+                  <a:srgbClr val="FFFFFF"/>
+                </a:solidFill>
+              </a:rPr>
+              <a:t>crash</a:t>
+            </a:r>
+            <a:r>
+              <a:rPr lang="es-AR" sz="1700" b="0" i="0" dirty="0">
+                <a:solidFill>
+                  <a:srgbClr val="FFFFFF"/>
+                </a:solidFill>
+              </a:rPr>
+              <a:t>), sino con </a:t>
+            </a:r>
+            <a:r>
+              <a:rPr lang="es-AR" sz="1700" b="0" i="0" dirty="0" err="1">
+                <a:solidFill>
+                  <a:srgbClr val="FFFFFF"/>
+                </a:solidFill>
+              </a:rPr>
+              <a:t>exit</a:t>
+            </a:r>
+            <a:r>
+              <a:rPr lang="es-AR" sz="1700" b="0" i="0" dirty="0">
+                <a:solidFill>
+                  <a:srgbClr val="FFFFFF"/>
+                </a:solidFill>
+              </a:rPr>
+              <a:t> 1 (EXIT_FAILURE),
+porque es el propio código quien llama a </a:t>
+            </a:r>
+            <a:r>
+              <a:rPr lang="es-AR" sz="1700" b="0" i="0" dirty="0" err="1">
+                <a:solidFill>
+                  <a:srgbClr val="FFFFFF"/>
+                </a:solidFill>
+              </a:rPr>
+              <a:t>exit</a:t>
+            </a:r>
+            <a:r>
+              <a:rPr lang="es-AR" sz="1700" b="0" i="0" dirty="0">
+                <a:solidFill>
+                  <a:srgbClr val="FFFFFF"/>
+                </a:solidFill>
+              </a:rPr>
+              <a:t>() de forma controlada.</a:t>
             </a:r>
           </a:p>
         </p:txBody>
@@ -4345,7 +5068,7 @@
         </p:nvSpPr>
         <p:spPr>
           <a:xfrm>
-            <a:off x="2011680" y="4160520"/>
+            <a:off x="2011680" y="3648456"/>
             <a:ext cx="8138160" cy="1417320"/>
           </a:xfrm>
           <a:prstGeom prst="rect">
@@ -4389,7 +5112,7 @@
         </p:nvSpPr>
         <p:spPr>
           <a:xfrm>
-            <a:off x="2176272" y="4297680"/>
+            <a:off x="2176272" y="3785616"/>
             <a:ext cx="7808976" cy="1143000"/>
           </a:xfrm>
           <a:prstGeom prst="rect">
@@ -4404,7 +5127,7 @@
           <a:lstStyle/>
           <a:p>
             <a:r>
-              <a:rPr sz="1300">
+              <a:rPr sz="1300" dirty="0">
                 <a:solidFill>
                   <a:srgbClr val="A6E3A1"/>
                 </a:solidFill>
@@ -4426,7 +5149,7 @@
         </p:nvSpPr>
         <p:spPr>
           <a:xfrm>
-            <a:off x="365760" y="5669280"/>
+            <a:off x="365760" y="5468112"/>
             <a:ext cx="11430000" cy="914400"/>
           </a:xfrm>
           <a:prstGeom prst="rect">
@@ -4470,8 +5193,8 @@
         </p:nvSpPr>
         <p:spPr>
           <a:xfrm>
-            <a:off x="640080" y="5715000"/>
-            <a:ext cx="4572000" cy="365760"/>
+            <a:off x="640080" y="5495544"/>
+            <a:ext cx="4572000" cy="307777"/>
           </a:xfrm>
           <a:prstGeom prst="rect">
             <a:avLst/>
@@ -4486,12 +5209,28 @@
           <a:p>
             <a:pPr algn="l"/>
             <a:r>
-              <a:rPr sz="1400" b="1" i="0">
+              <a:rPr lang="es-AR" sz="1400" b="1" i="0" dirty="0">
                 <a:solidFill>
                   <a:srgbClr val="89B4FA"/>
                 </a:solidFill>
               </a:rPr>
-              <a:t>Por que muestra none?</a:t>
+              <a:t>Por que muestra </a:t>
+            </a:r>
+            <a:r>
+              <a:rPr lang="es-AR" sz="1400" b="1" i="0" dirty="0" err="1">
+                <a:solidFill>
+                  <a:srgbClr val="89B4FA"/>
+                </a:solidFill>
+              </a:rPr>
+              <a:t>none</a:t>
+            </a:r>
+            <a:r>
+              <a:rPr lang="es-AR" sz="1400" b="1" i="0" dirty="0">
+                <a:solidFill>
+                  <a:srgbClr val="89B4FA"/>
+                </a:solidFill>
+              </a:rPr>
+              <a:t>?</a:t>
             </a:r>
           </a:p>
         </p:txBody>
@@ -4504,8 +5243,8 @@
         </p:nvSpPr>
         <p:spPr>
           <a:xfrm>
-            <a:off x="640080" y="6062472"/>
-            <a:ext cx="10972800" cy="475488"/>
+            <a:off x="640080" y="5797296"/>
+            <a:ext cx="10972800" cy="492443"/>
           </a:xfrm>
           <a:prstGeom prst="rect">
             <a:avLst/>
@@ -4520,12 +5259,44 @@
           <a:p>
             <a:pPr algn="l"/>
             <a:r>
-              <a:rPr sz="1300" b="0" i="0">
+              <a:rPr lang="es-AR" sz="1300" b="0" i="0" dirty="0">
                 <a:solidFill>
                   <a:srgbClr val="BAC2DE"/>
                 </a:solidFill>
               </a:rPr>
-              <a:t>En Linux, la senal SIGFPE es entregada tan rapido que las banderas del FPU aun no se propagaron al registro que lee fetestexcept(). Comportamiento del kernel Linux.</a:t>
+              <a:t>En Linux, la señal SIGFPE es entregada tan rápido que las banderas del FPU aun no se propagaron al registro que lee </a:t>
+            </a:r>
+            <a:r>
+              <a:rPr lang="es-AR" sz="1300" b="0" i="0" dirty="0" err="1">
+                <a:solidFill>
+                  <a:srgbClr val="BAC2DE"/>
+                </a:solidFill>
+              </a:rPr>
+              <a:t>fetestexcept</a:t>
+            </a:r>
+            <a:r>
+              <a:rPr lang="es-AR" sz="1300" b="0" i="0" dirty="0">
+                <a:solidFill>
+                  <a:srgbClr val="BAC2DE"/>
+                </a:solidFill>
+              </a:rPr>
+              <a:t>(). Comportamiento del </a:t>
+            </a:r>
+            <a:r>
+              <a:rPr lang="es-AR" sz="1300" b="0" i="0" dirty="0" err="1">
+                <a:solidFill>
+                  <a:srgbClr val="BAC2DE"/>
+                </a:solidFill>
+              </a:rPr>
+              <a:t>kernel</a:t>
+            </a:r>
+            <a:r>
+              <a:rPr lang="es-AR" sz="1300" b="0" i="0" dirty="0">
+                <a:solidFill>
+                  <a:srgbClr val="BAC2DE"/>
+                </a:solidFill>
+              </a:rPr>
+              <a:t> Linux.</a:t>
             </a:r>
           </a:p>
         </p:txBody>
@@ -4772,7 +5543,7 @@
         <p:spPr>
           <a:xfrm>
             <a:off x="3566160" y="1143000"/>
-            <a:ext cx="8046720" cy="502920"/>
+            <a:ext cx="8046720" cy="307777"/>
           </a:xfrm>
           <a:prstGeom prst="rect">
             <a:avLst/>
@@ -4787,12 +5558,12 @@
           <a:p>
             <a:pPr algn="l"/>
             <a:r>
-              <a:rPr sz="1400" b="0" i="0">
+              <a:rPr lang="es-AR" sz="1400" b="0" i="0" dirty="0">
                 <a:solidFill>
                   <a:srgbClr val="FFFFFF"/>
                 </a:solidFill>
               </a:rPr>
-              <a:t>Levanta manualmente una excepcion matematica (modo pasivo).</a:t>
+              <a:t>Levanta manualmente una excepción matemática (modo pasivo).</a:t>
             </a:r>
           </a:p>
         </p:txBody>
@@ -4884,7 +5655,7 @@
         <p:spPr>
           <a:xfrm>
             <a:off x="3566160" y="1965960"/>
-            <a:ext cx="8046720" cy="502920"/>
+            <a:ext cx="8046720" cy="307777"/>
           </a:xfrm>
           <a:prstGeom prst="rect">
             <a:avLst/>
@@ -4899,12 +5670,12 @@
           <a:p>
             <a:pPr algn="l"/>
             <a:r>
-              <a:rPr sz="1400" b="0" i="0">
+              <a:rPr lang="es-AR" sz="1400" b="0" i="0" dirty="0">
                 <a:solidFill>
                   <a:srgbClr val="FFFFFF"/>
                 </a:solidFill>
               </a:rPr>
-              <a:t>Limpia todas las banderas de excepcion activas.</a:t>
+              <a:t>Limpia todas las banderas de excepción activas.</a:t>
             </a:r>
           </a:p>
         </p:txBody>
@@ -4996,7 +5767,7 @@
         <p:spPr>
           <a:xfrm>
             <a:off x="3566160" y="2788920"/>
-            <a:ext cx="8046720" cy="502920"/>
+            <a:ext cx="8046720" cy="307777"/>
           </a:xfrm>
           <a:prstGeom prst="rect">
             <a:avLst/>
@@ -5011,12 +5782,12 @@
           <a:p>
             <a:pPr algn="l"/>
             <a:r>
-              <a:rPr sz="1400" b="0" i="0">
+              <a:rPr lang="es-AR" sz="1400" b="0" i="0" dirty="0">
                 <a:solidFill>
                   <a:srgbClr val="FFFFFF"/>
                 </a:solidFill>
               </a:rPr>
-              <a:t>Consulta si una excepcion determinada esta encendida.</a:t>
+              <a:t>Consulta si una excepción determinada esta encendida.</a:t>
             </a:r>
           </a:p>
         </p:txBody>
@@ -5108,7 +5879,7 @@
         <p:spPr>
           <a:xfrm>
             <a:off x="3566160" y="3611879"/>
-            <a:ext cx="8046720" cy="502920"/>
+            <a:ext cx="8046720" cy="307777"/>
           </a:xfrm>
           <a:prstGeom prst="rect">
             <a:avLst/>
@@ -5123,12 +5894,12 @@
           <a:p>
             <a:pPr algn="l"/>
             <a:r>
-              <a:rPr sz="1400" b="0" i="0">
+              <a:rPr lang="es-AR" sz="1400" b="0" i="0" dirty="0">
                 <a:solidFill>
                   <a:srgbClr val="FFFFFF"/>
                 </a:solidFill>
               </a:rPr>
-              <a:t>Activa modo de excepcion activa: emite SIGFPE al ocurrir un error.</a:t>
+              <a:t>Activa modo de excepción activa: emite SIGFPE al ocurrir un error.</a:t>
             </a:r>
           </a:p>
         </p:txBody>
@@ -5220,7 +5991,7 @@
         <p:spPr>
           <a:xfrm>
             <a:off x="3566160" y="4434840"/>
-            <a:ext cx="8046720" cy="502920"/>
+            <a:ext cx="8046720" cy="307777"/>
           </a:xfrm>
           <a:prstGeom prst="rect">
             <a:avLst/>
@@ -5235,12 +6006,44 @@
           <a:p>
             <a:pPr algn="l"/>
             <a:r>
-              <a:rPr sz="1400" b="0" i="0">
+              <a:rPr lang="es-AR" sz="1400" b="0" i="0" dirty="0">
                 <a:solidFill>
                   <a:srgbClr val="FFFFFF"/>
                 </a:solidFill>
               </a:rPr>
-              <a:t>Registra un handler. Captura la senal y evita el crash abrupto.</a:t>
+              <a:t>Registra un </a:t>
+            </a:r>
+            <a:r>
+              <a:rPr lang="es-AR" sz="1400" b="0" i="0" dirty="0" err="1">
+                <a:solidFill>
+                  <a:srgbClr val="FFFFFF"/>
+                </a:solidFill>
+              </a:rPr>
+              <a:t>handler</a:t>
+            </a:r>
+            <a:r>
+              <a:rPr lang="es-AR" sz="1400" b="0" i="0" dirty="0">
+                <a:solidFill>
+                  <a:srgbClr val="FFFFFF"/>
+                </a:solidFill>
+              </a:rPr>
+              <a:t>. Captura la señal y evita el </a:t>
+            </a:r>
+            <a:r>
+              <a:rPr lang="es-AR" sz="1400" b="0" i="0" dirty="0" err="1">
+                <a:solidFill>
+                  <a:srgbClr val="FFFFFF"/>
+                </a:solidFill>
+              </a:rPr>
+              <a:t>crash</a:t>
+            </a:r>
+            <a:r>
+              <a:rPr lang="es-AR" sz="1400" b="0" i="0" dirty="0">
+                <a:solidFill>
+                  <a:srgbClr val="FFFFFF"/>
+                </a:solidFill>
+              </a:rPr>
+              <a:t> abrupto.</a:t>
             </a:r>
           </a:p>
         </p:txBody>
@@ -5254,7 +6057,7 @@
         <p:spPr>
           <a:xfrm>
             <a:off x="548640" y="5870448"/>
-            <a:ext cx="11064240" cy="685800"/>
+            <a:ext cx="11064240" cy="307777"/>
           </a:xfrm>
           <a:prstGeom prst="rect">
             <a:avLst/>
@@ -5269,12 +6072,60 @@
           <a:p>
             <a:pPr algn="l"/>
             <a:r>
-              <a:rPr sz="1400" b="0" i="1">
+              <a:rPr lang="es-AR" sz="1400" b="0" i="1" dirty="0">
                 <a:solidFill>
                   <a:srgbClr val="BAC2DE"/>
                 </a:solidFill>
               </a:rPr>
-              <a:t>Flujo: feenableexcept activa alertas -&gt; error matematico dispara SIGFPE -&gt; signal() redirige a fpe_handler -&gt; programa termina de forma controlada.</a:t>
+              <a:t>Flujo: </a:t>
+            </a:r>
+            <a:r>
+              <a:rPr lang="es-AR" sz="1400" b="0" i="1" dirty="0" err="1">
+                <a:solidFill>
+                  <a:srgbClr val="BAC2DE"/>
+                </a:solidFill>
+              </a:rPr>
+              <a:t>feenableexcept</a:t>
+            </a:r>
+            <a:r>
+              <a:rPr lang="es-AR" sz="1400" b="0" i="1" dirty="0">
+                <a:solidFill>
+                  <a:srgbClr val="BAC2DE"/>
+                </a:solidFill>
+              </a:rPr>
+              <a:t> activa alertas -&gt; error matemático dispara SIGFPE -&gt; </a:t>
+            </a:r>
+            <a:r>
+              <a:rPr lang="es-AR" sz="1400" b="0" i="1" dirty="0" err="1">
+                <a:solidFill>
+                  <a:srgbClr val="BAC2DE"/>
+                </a:solidFill>
+              </a:rPr>
+              <a:t>signal</a:t>
+            </a:r>
+            <a:r>
+              <a:rPr lang="es-AR" sz="1400" b="0" i="1" dirty="0">
+                <a:solidFill>
+                  <a:srgbClr val="BAC2DE"/>
+                </a:solidFill>
+              </a:rPr>
+              <a:t>() redirige a </a:t>
+            </a:r>
+            <a:r>
+              <a:rPr lang="es-AR" sz="1400" b="0" i="1" dirty="0" err="1">
+                <a:solidFill>
+                  <a:srgbClr val="BAC2DE"/>
+                </a:solidFill>
+              </a:rPr>
+              <a:t>fpe_handler</a:t>
+            </a:r>
+            <a:r>
+              <a:rPr lang="es-AR" sz="1400" b="0" i="1" dirty="0">
+                <a:solidFill>
+                  <a:srgbClr val="BAC2DE"/>
+                </a:solidFill>
+              </a:rPr>
+              <a:t> -&gt; programa termina de forma controlada.</a:t>
             </a:r>
           </a:p>
         </p:txBody>
@@ -5605,4 +6456,24 @@
   </a:objectDefaults>
   <a:extraClrSchemeLst/>
 </a:theme>
+</file>
+
+<file path=ppt/webextensions/taskpanes.xml><?xml version="1.0" encoding="utf-8"?>
+<wetp:taskpanes xmlns:wetp="http://schemas.microsoft.com/office/webextensions/taskpanes/2010/11">
+  <wetp:taskpane dockstate="right" visibility="0" width="350" row="1">
+    <wetp:webextensionref xmlns:r="http://schemas.openxmlformats.org/officeDocument/2006/relationships" r:id="rId1"/>
+  </wetp:taskpane>
+</wetp:taskpanes>
+</file>
+
+<file path=ppt/webextensions/webextension1.xml><?xml version="1.0" encoding="utf-8"?>
+<we:webextension xmlns:we="http://schemas.microsoft.com/office/webextensions/webextension/2010/11" id="{F8E36DC7-DFA2-42F0-B435-BBEB8807247D}">
+  <we:reference id="wa200010001" version="1.0.0.1" store="en-US" storeType="OMEX"/>
+  <we:alternateReferences>
+    <we:reference id="wa200010001" version="1.0.0.1" store="en-US" storeType="OMEX"/>
+  </we:alternateReferences>
+  <we:properties/>
+  <we:bindings/>
+  <we:snapshot xmlns:r="http://schemas.openxmlformats.org/officeDocument/2006/relationships"/>
+</we:webextension>
 </file>
--- a/Tp3/Ejercicio_6_Presentacion.pptx
+++ b/Tp3/Ejercicio_6_Presentacion.pptx
@@ -4274,7 +4274,7 @@
         <p:spPr>
           <a:xfrm>
             <a:off x="548640" y="1554480"/>
-            <a:ext cx="11064240" cy="2939266"/>
+            <a:ext cx="11064240" cy="2677656"/>
           </a:xfrm>
           <a:prstGeom prst="rect">
             <a:avLst/>
@@ -4493,7 +4493,7 @@
                 </a:solidFill>
               </a:rPr>
               <a:t>() le ordena al hardware que emita una interrupción activa (SIGFPE)
-cada vez que ocurre un error de punto flotante. Como no hay ningún </a:t>
+cada vez que ocurre un error de punto flotante. Como no hay </a:t>
             </a:r>
             <a:r>
               <a:rPr lang="es-AR" sz="1700" b="0" i="0" dirty="0" err="1">
@@ -4509,8 +4509,23 @@
                   <a:srgbClr val="FFFFFF"/>
                 </a:solidFill>
               </a:rPr>
-              <a:t>
-registrado para capturar esa señal, el sistema operativo mata el proceso.</a:t>
+              <a:t>, se interrum</a:t>
+            </a:r>
+            <a:r>
+              <a:rPr lang="es-AR" sz="1700" dirty="0">
+                <a:solidFill>
+                  <a:srgbClr val="FFFFFF"/>
+                </a:solidFill>
+              </a:rPr>
+              <a:t>pe el proceso</a:t>
+            </a:r>
+            <a:r>
+              <a:rPr lang="es-AR" sz="1700" b="0" i="0" dirty="0">
+                <a:solidFill>
+                  <a:srgbClr val="FFFFFF"/>
+                </a:solidFill>
+              </a:rPr>
+              <a:t>.</a:t>
             </a:r>
           </a:p>
         </p:txBody>
@@ -4523,7 +4538,7 @@
         </p:nvSpPr>
         <p:spPr>
           <a:xfrm>
-            <a:off x="1674329" y="4493746"/>
+            <a:off x="365760" y="4402836"/>
             <a:ext cx="8138160" cy="822960"/>
           </a:xfrm>
           <a:prstGeom prst="rect">
@@ -4567,7 +4582,7 @@
         </p:nvSpPr>
         <p:spPr>
           <a:xfrm>
-            <a:off x="1838921" y="4630906"/>
+            <a:off x="530352" y="4539996"/>
             <a:ext cx="7808976" cy="548640"/>
           </a:xfrm>
           <a:prstGeom prst="rect">
@@ -4582,7 +4597,7 @@
           <a:lstStyle/>
           <a:p>
             <a:r>
-              <a:rPr sz="1300">
+              <a:rPr sz="1300" dirty="0">
                 <a:solidFill>
                   <a:srgbClr val="A6E3A1"/>
                 </a:solidFill>
@@ -4681,7 +4696,7 @@
         <p:spPr>
           <a:xfrm>
             <a:off x="640080" y="5833872"/>
-            <a:ext cx="10972800" cy="658368"/>
+            <a:ext cx="10972800" cy="507831"/>
           </a:xfrm>
           <a:prstGeom prst="rect">
             <a:avLst/>
@@ -4696,12 +4711,148 @@
           <a:p>
             <a:pPr algn="l"/>
             <a:r>
-              <a:rPr sz="1300" b="0" i="0">
+              <a:rPr sz="1300" b="0" i="0" dirty="0" err="1">
                 <a:solidFill>
                   <a:srgbClr val="BAC2DE"/>
                 </a:solidFill>
               </a:rPr>
-              <a:t>Desenenmascara las excepciones del FPU. Las convierte de modo pasivo (solo prende un bit) a modo activo (emite SIGFPE inmediatamente).</a:t>
+              <a:t>Desenenmascara</a:t>
+            </a:r>
+            <a:r>
+              <a:rPr sz="1300" b="0" i="0" dirty="0">
+                <a:solidFill>
+                  <a:srgbClr val="BAC2DE"/>
+                </a:solidFill>
+              </a:rPr>
+              <a:t> las </a:t>
+            </a:r>
+            <a:r>
+              <a:rPr sz="1300" b="0" i="0" dirty="0" err="1">
+                <a:solidFill>
+                  <a:srgbClr val="BAC2DE"/>
+                </a:solidFill>
+              </a:rPr>
+              <a:t>excepciones</a:t>
+            </a:r>
+            <a:r>
+              <a:rPr sz="1300" b="0" i="0" dirty="0">
+                <a:solidFill>
+                  <a:srgbClr val="BAC2DE"/>
+                </a:solidFill>
+              </a:rPr>
+              <a:t> del FPU. Las </a:t>
+            </a:r>
+            <a:r>
+              <a:rPr sz="1300" b="0" i="0" dirty="0" err="1">
+                <a:solidFill>
+                  <a:srgbClr val="BAC2DE"/>
+                </a:solidFill>
+              </a:rPr>
+              <a:t>convierte</a:t>
+            </a:r>
+            <a:r>
+              <a:rPr sz="1300" b="0" i="0" dirty="0">
+                <a:solidFill>
+                  <a:srgbClr val="BAC2DE"/>
+                </a:solidFill>
+              </a:rPr>
+              <a:t> de modo </a:t>
+            </a:r>
+            <a:r>
+              <a:rPr sz="1300" b="0" i="0" dirty="0" err="1">
+                <a:solidFill>
+                  <a:srgbClr val="BAC2DE"/>
+                </a:solidFill>
+              </a:rPr>
+              <a:t>pasivo</a:t>
+            </a:r>
+            <a:r>
+              <a:rPr sz="1300" b="0" i="0" dirty="0">
+                <a:solidFill>
+                  <a:srgbClr val="BAC2DE"/>
+                </a:solidFill>
+              </a:rPr>
+              <a:t> (</a:t>
+            </a:r>
+            <a:r>
+              <a:rPr lang="es-MX" sz="1300" dirty="0">
+                <a:solidFill>
+                  <a:srgbClr val="BAC2DE"/>
+                </a:solidFill>
+              </a:rPr>
+              <a:t>se activan </a:t>
+            </a:r>
+            <a:r>
+              <a:rPr lang="es-MX" sz="1300" dirty="0" err="1">
+                <a:solidFill>
+                  <a:srgbClr val="BAC2DE"/>
+                </a:solidFill>
+              </a:rPr>
+              <a:t>flags</a:t>
+            </a:r>
+            <a:r>
+              <a:rPr lang="es-MX" sz="1300" dirty="0">
+                <a:solidFill>
+                  <a:srgbClr val="BAC2DE"/>
+                </a:solidFill>
+              </a:rPr>
+              <a:t> internas del FPU sin interrumpir el programa</a:t>
+            </a:r>
+            <a:r>
+              <a:rPr sz="1300" b="0" i="0" dirty="0">
+                <a:solidFill>
+                  <a:srgbClr val="BAC2DE"/>
+                </a:solidFill>
+              </a:rPr>
+              <a:t>) a modo </a:t>
+            </a:r>
+            <a:r>
+              <a:rPr sz="1300" b="0" i="0" dirty="0" err="1">
+                <a:solidFill>
+                  <a:srgbClr val="BAC2DE"/>
+                </a:solidFill>
+              </a:rPr>
+              <a:t>activo</a:t>
+            </a:r>
+            <a:r>
+              <a:rPr sz="1300" b="0" i="0" dirty="0">
+                <a:solidFill>
+                  <a:srgbClr val="BAC2DE"/>
+                </a:solidFill>
+              </a:rPr>
+              <a:t> (</a:t>
+            </a:r>
+            <a:r>
+              <a:rPr sz="1300" b="0" i="0" dirty="0" err="1">
+                <a:solidFill>
+                  <a:srgbClr val="BAC2DE"/>
+                </a:solidFill>
+              </a:rPr>
+              <a:t>emite</a:t>
+            </a:r>
+            <a:r>
+              <a:rPr sz="1300" b="0" i="0" dirty="0">
+                <a:solidFill>
+                  <a:srgbClr val="BAC2DE"/>
+                </a:solidFill>
+              </a:rPr>
+              <a:t> SIGFPE </a:t>
+            </a:r>
+            <a:r>
+              <a:rPr sz="1300" b="0" i="0" dirty="0" err="1">
+                <a:solidFill>
+                  <a:srgbClr val="BAC2DE"/>
+                </a:solidFill>
+              </a:rPr>
+              <a:t>inmediatamente</a:t>
+            </a:r>
+            <a:r>
+              <a:rPr sz="1300" b="0" i="0" dirty="0">
+                <a:solidFill>
+                  <a:srgbClr val="BAC2DE"/>
+                </a:solidFill>
+              </a:rPr>
+              <a:t>).</a:t>
             </a:r>
           </a:p>
         </p:txBody>

--- a/Tp3/Ejercicio_6_Presentacion.pptx
+++ b/Tp3/Ejercicio_6_Presentacion.pptx
@@ -306,7 +306,7 @@
           <a:p>
             <a:fld id="{5BCAD085-E8A6-8845-BD4E-CB4CCA059FC4}" type="datetimeFigureOut">
               <a:rPr lang="en-US" smtClean="0"/>
-              <a:t>3/30/2026</a:t>
+              <a:t>3/31/2026</a:t>
             </a:fld>
             <a:endParaRPr lang="en-US"/>
           </a:p>
@@ -474,7 +474,7 @@
           <a:p>
             <a:fld id="{5BCAD085-E8A6-8845-BD4E-CB4CCA059FC4}" type="datetimeFigureOut">
               <a:rPr lang="en-US" smtClean="0"/>
-              <a:t>3/30/2026</a:t>
+              <a:t>3/31/2026</a:t>
             </a:fld>
             <a:endParaRPr lang="en-US"/>
           </a:p>
@@ -652,7 +652,7 @@
           <a:p>
             <a:fld id="{5BCAD085-E8A6-8845-BD4E-CB4CCA059FC4}" type="datetimeFigureOut">
               <a:rPr lang="en-US" smtClean="0"/>
-              <a:t>3/30/2026</a:t>
+              <a:t>3/31/2026</a:t>
             </a:fld>
             <a:endParaRPr lang="en-US"/>
           </a:p>
@@ -820,7 +820,7 @@
           <a:p>
             <a:fld id="{5BCAD085-E8A6-8845-BD4E-CB4CCA059FC4}" type="datetimeFigureOut">
               <a:rPr lang="en-US" smtClean="0"/>
-              <a:t>3/30/2026</a:t>
+              <a:t>3/31/2026</a:t>
             </a:fld>
             <a:endParaRPr lang="en-US"/>
           </a:p>
@@ -1065,7 +1065,7 @@
           <a:p>
             <a:fld id="{5BCAD085-E8A6-8845-BD4E-CB4CCA059FC4}" type="datetimeFigureOut">
               <a:rPr lang="en-US" smtClean="0"/>
-              <a:t>3/30/2026</a:t>
+              <a:t>3/31/2026</a:t>
             </a:fld>
             <a:endParaRPr lang="en-US"/>
           </a:p>
@@ -1350,7 +1350,7 @@
           <a:p>
             <a:fld id="{5BCAD085-E8A6-8845-BD4E-CB4CCA059FC4}" type="datetimeFigureOut">
               <a:rPr lang="en-US" smtClean="0"/>
-              <a:t>3/30/2026</a:t>
+              <a:t>3/31/2026</a:t>
             </a:fld>
             <a:endParaRPr lang="en-US"/>
           </a:p>
@@ -1769,7 +1769,7 @@
           <a:p>
             <a:fld id="{5BCAD085-E8A6-8845-BD4E-CB4CCA059FC4}" type="datetimeFigureOut">
               <a:rPr lang="en-US" smtClean="0"/>
-              <a:t>3/30/2026</a:t>
+              <a:t>3/31/2026</a:t>
             </a:fld>
             <a:endParaRPr lang="en-US"/>
           </a:p>
@@ -1886,7 +1886,7 @@
           <a:p>
             <a:fld id="{5BCAD085-E8A6-8845-BD4E-CB4CCA059FC4}" type="datetimeFigureOut">
               <a:rPr lang="en-US" smtClean="0"/>
-              <a:t>3/30/2026</a:t>
+              <a:t>3/31/2026</a:t>
             </a:fld>
             <a:endParaRPr lang="en-US"/>
           </a:p>
@@ -1981,7 +1981,7 @@
           <a:p>
             <a:fld id="{5BCAD085-E8A6-8845-BD4E-CB4CCA059FC4}" type="datetimeFigureOut">
               <a:rPr lang="en-US" smtClean="0"/>
-              <a:t>3/30/2026</a:t>
+              <a:t>3/31/2026</a:t>
             </a:fld>
             <a:endParaRPr lang="en-US"/>
           </a:p>
@@ -2256,7 +2256,7 @@
           <a:p>
             <a:fld id="{5BCAD085-E8A6-8845-BD4E-CB4CCA059FC4}" type="datetimeFigureOut">
               <a:rPr lang="en-US" smtClean="0"/>
-              <a:t>3/30/2026</a:t>
+              <a:t>3/31/2026</a:t>
             </a:fld>
             <a:endParaRPr lang="en-US"/>
           </a:p>
@@ -2508,7 +2508,7 @@
           <a:p>
             <a:fld id="{5BCAD085-E8A6-8845-BD4E-CB4CCA059FC4}" type="datetimeFigureOut">
               <a:rPr lang="en-US" smtClean="0"/>
-              <a:t>3/30/2026</a:t>
+              <a:t>3/31/2026</a:t>
             </a:fld>
             <a:endParaRPr lang="en-US"/>
           </a:p>
@@ -2719,7 +2719,7 @@
           <a:p>
             <a:fld id="{5BCAD085-E8A6-8845-BD4E-CB4CCA059FC4}" type="datetimeFigureOut">
               <a:rPr lang="en-US" smtClean="0"/>
-              <a:t>3/30/2026</a:t>
+              <a:t>3/31/2026</a:t>
             </a:fld>
             <a:endParaRPr lang="en-US"/>
           </a:p>
@@ -3080,14 +3080,6 @@
 <file path=ppt/slides/slide1.xml><?xml version="1.0" encoding="utf-8"?>
 <p:sld xmlns:a="http://schemas.openxmlformats.org/drawingml/2006/main" xmlns:r="http://schemas.openxmlformats.org/officeDocument/2006/relationships" xmlns:p="http://schemas.openxmlformats.org/presentationml/2006/main">
   <p:cSld>
-    <p:bg>
-      <p:bgPr>
-        <a:solidFill>
-          <a:srgbClr val="1E1E2E"/>
-        </a:solidFill>
-        <a:effectLst/>
-      </p:bgPr>
-    </p:bg>
     <p:spTree>
       <p:nvGrpSpPr>
         <p:cNvPr id="1" name=""/>
@@ -3216,7 +3208,7 @@
             <a:r>
               <a:rPr sz="4400" b="1" i="0" dirty="0" err="1">
                 <a:solidFill>
-                  <a:srgbClr val="89B4FA"/>
+                  <a:schemeClr val="accent1"/>
                 </a:solidFill>
               </a:rPr>
               <a:t>Ejercicio</a:t>
@@ -3224,7 +3216,7 @@
             <a:r>
               <a:rPr sz="4400" b="1" i="0" dirty="0">
                 <a:solidFill>
-                  <a:srgbClr val="89B4FA"/>
+                  <a:schemeClr val="accent1"/>
                 </a:solidFill>
               </a:rPr>
               <a:t> </a:t>
@@ -3232,14 +3224,14 @@
             <a:r>
               <a:rPr lang="es-MX" sz="4400" b="1" i="0" dirty="0">
                 <a:solidFill>
-                  <a:srgbClr val="89B4FA"/>
+                  <a:schemeClr val="accent1"/>
                 </a:solidFill>
               </a:rPr>
               <a:t>6</a:t>
             </a:r>
             <a:endParaRPr sz="4400" b="1" i="0" dirty="0">
               <a:solidFill>
-                <a:srgbClr val="89B4FA"/>
+                <a:schemeClr val="accent1"/>
               </a:solidFill>
             </a:endParaRPr>
           </a:p>
@@ -3269,83 +3261,43 @@
           <a:p>
             <a:pPr algn="ctr"/>
             <a:r>
-              <a:rPr sz="2200" b="0" i="0" dirty="0" err="1">
-                <a:solidFill>
-                  <a:srgbClr val="BAC2DE"/>
-                </a:solidFill>
-              </a:rPr>
+              <a:rPr sz="2200" b="1" i="0" dirty="0" err="1"/>
               <a:t>Excepciones</a:t>
             </a:r>
             <a:r>
-              <a:rPr sz="2200" b="0" i="0" dirty="0">
-                <a:solidFill>
-                  <a:srgbClr val="BAC2DE"/>
-                </a:solidFill>
-              </a:rPr>
+              <a:rPr sz="2200" b="1" i="0" dirty="0"/>
               <a:t> de Punto </a:t>
             </a:r>
             <a:r>
-              <a:rPr sz="2200" b="0" i="0" dirty="0" err="1">
-                <a:solidFill>
-                  <a:srgbClr val="BAC2DE"/>
-                </a:solidFill>
-              </a:rPr>
+              <a:rPr sz="2200" b="1" i="0" dirty="0" err="1"/>
               <a:t>Flotante</a:t>
             </a:r>
             <a:r>
-              <a:rPr sz="2200" b="0" i="0" dirty="0">
-                <a:solidFill>
-                  <a:srgbClr val="BAC2DE"/>
-                </a:solidFill>
-              </a:rPr>
+              <a:rPr sz="2200" b="1" i="0" dirty="0"/>
               <a:t> y </a:t>
             </a:r>
             <a:r>
-              <a:rPr sz="2200" b="0" i="0" dirty="0" err="1">
-                <a:solidFill>
-                  <a:srgbClr val="BAC2DE"/>
-                </a:solidFill>
-              </a:rPr>
+              <a:rPr sz="2200" b="1" i="0" dirty="0" err="1"/>
               <a:t>Manejo</a:t>
             </a:r>
             <a:r>
-              <a:rPr sz="2200" b="0" i="0" dirty="0">
-                <a:solidFill>
-                  <a:srgbClr val="BAC2DE"/>
-                </a:solidFill>
-              </a:rPr>
+              <a:rPr sz="2200" b="1" i="0" dirty="0"/>
               <a:t> de Se</a:t>
             </a:r>
             <a:r>
-              <a:rPr lang="es-MX" sz="2200" dirty="0">
-                <a:solidFill>
-                  <a:srgbClr val="BAC2DE"/>
-                </a:solidFill>
-              </a:rPr>
+              <a:rPr lang="es-MX" sz="2200" b="1" dirty="0"/>
               <a:t>ñ</a:t>
             </a:r>
             <a:r>
-              <a:rPr sz="2200" b="0" i="0" dirty="0">
-                <a:solidFill>
-                  <a:srgbClr val="BAC2DE"/>
-                </a:solidFill>
-              </a:rPr>
+              <a:rPr sz="2200" b="1" i="0" dirty="0"/>
               <a:t>ales </a:t>
             </a:r>
             <a:r>
-              <a:rPr sz="2200" b="0" i="0" dirty="0" err="1">
-                <a:solidFill>
-                  <a:srgbClr val="BAC2DE"/>
-                </a:solidFill>
-              </a:rPr>
+              <a:rPr sz="2200" b="1" i="0" dirty="0" err="1"/>
               <a:t>en</a:t>
             </a:r>
             <a:r>
-              <a:rPr sz="2200" b="0" i="0" dirty="0">
-                <a:solidFill>
-                  <a:srgbClr val="BAC2DE"/>
-                </a:solidFill>
-              </a:rPr>
+              <a:rPr sz="2200" b="1" i="0" dirty="0"/>
               <a:t> C</a:t>
             </a:r>
           </a:p>
@@ -3360,7 +3312,7 @@
         <p:spPr>
           <a:xfrm>
             <a:off x="914400" y="5029200"/>
-            <a:ext cx="10360152" cy="548640"/>
+            <a:ext cx="10360152" cy="323165"/>
           </a:xfrm>
           <a:prstGeom prst="rect">
             <a:avLst/>
@@ -3375,12 +3327,32 @@
           <a:p>
             <a:pPr algn="ctr"/>
             <a:r>
-              <a:rPr sz="1500" b="0" i="1">
-                <a:solidFill>
-                  <a:srgbClr val="BAC2DE"/>
-                </a:solidFill>
-              </a:rPr>
-              <a:t>Control y Sistemas  -  Trabajo Practico 3</a:t>
+              <a:rPr sz="1500" b="1" i="1" dirty="0"/>
+              <a:t>Control y </a:t>
+            </a:r>
+            <a:r>
+              <a:rPr sz="1500" b="1" i="1" dirty="0" err="1"/>
+              <a:t>Sistemas</a:t>
+            </a:r>
+            <a:r>
+              <a:rPr sz="1500" b="1" i="1" dirty="0"/>
+              <a:t>  -  </a:t>
+            </a:r>
+            <a:r>
+              <a:rPr sz="1500" b="1" i="1" dirty="0" err="1"/>
+              <a:t>Trabajo</a:t>
+            </a:r>
+            <a:r>
+              <a:rPr sz="1500" b="1" i="1" dirty="0"/>
+              <a:t> </a:t>
+            </a:r>
+            <a:r>
+              <a:rPr sz="1500" b="1" i="1" dirty="0" err="1"/>
+              <a:t>Practico</a:t>
+            </a:r>
+            <a:r>
+              <a:rPr sz="1500" b="1" i="1" dirty="0"/>
+              <a:t> 3</a:t>
             </a:r>
           </a:p>
         </p:txBody>
@@ -3396,14 +3368,6 @@
 <file path=ppt/slides/slide2.xml><?xml version="1.0" encoding="utf-8"?>
 <p:sld xmlns:a="http://schemas.openxmlformats.org/drawingml/2006/main" xmlns:r="http://schemas.openxmlformats.org/officeDocument/2006/relationships" xmlns:p="http://schemas.openxmlformats.org/presentationml/2006/main">
   <p:cSld>
-    <p:bg>
-      <p:bgPr>
-        <a:solidFill>
-          <a:srgbClr val="1E1E2E"/>
-        </a:solidFill>
-        <a:effectLst/>
-      </p:bgPr>
-    </p:bg>
     <p:spTree>
       <p:nvGrpSpPr>
         <p:cNvPr id="1" name=""/>
@@ -3549,7 +3513,7 @@
         <p:spPr>
           <a:xfrm>
             <a:off x="365760" y="1005840"/>
-            <a:ext cx="11430000" cy="457200"/>
+            <a:ext cx="11430000" cy="369332"/>
           </a:xfrm>
           <a:prstGeom prst="rect">
             <a:avLst/>
@@ -3564,12 +3528,76 @@
           <a:p>
             <a:pPr algn="l"/>
             <a:r>
-              <a:rPr sz="1800" b="1" i="0">
-                <a:solidFill>
-                  <a:srgbClr val="F9E2AF"/>
-                </a:solidFill>
-              </a:rPr>
-              <a:t>Son los resultados consistentes con las operaciones ejecutadas?</a:t>
+              <a:rPr sz="1800" b="1" i="0" dirty="0">
+                <a:solidFill>
+                  <a:srgbClr val="C00000"/>
+                </a:solidFill>
+              </a:rPr>
+              <a:t>Son los </a:t>
+            </a:r>
+            <a:r>
+              <a:rPr sz="1800" b="1" i="0" dirty="0" err="1">
+                <a:solidFill>
+                  <a:srgbClr val="C00000"/>
+                </a:solidFill>
+              </a:rPr>
+              <a:t>resultados</a:t>
+            </a:r>
+            <a:r>
+              <a:rPr sz="1800" b="1" i="0" dirty="0">
+                <a:solidFill>
+                  <a:srgbClr val="C00000"/>
+                </a:solidFill>
+              </a:rPr>
+              <a:t> </a:t>
+            </a:r>
+            <a:r>
+              <a:rPr sz="1800" b="1" i="0" dirty="0" err="1">
+                <a:solidFill>
+                  <a:srgbClr val="C00000"/>
+                </a:solidFill>
+              </a:rPr>
+              <a:t>consistentes</a:t>
+            </a:r>
+            <a:r>
+              <a:rPr sz="1800" b="1" i="0" dirty="0">
+                <a:solidFill>
+                  <a:srgbClr val="C00000"/>
+                </a:solidFill>
+              </a:rPr>
+              <a:t> con las </a:t>
+            </a:r>
+            <a:r>
+              <a:rPr sz="1800" b="1" i="0" dirty="0" err="1">
+                <a:solidFill>
+                  <a:srgbClr val="C00000"/>
+                </a:solidFill>
+              </a:rPr>
+              <a:t>operaciones</a:t>
+            </a:r>
+            <a:r>
+              <a:rPr sz="1800" b="1" i="0" dirty="0">
+                <a:solidFill>
+                  <a:srgbClr val="C00000"/>
+                </a:solidFill>
+              </a:rPr>
+              <a:t> </a:t>
+            </a:r>
+            <a:r>
+              <a:rPr sz="1800" b="1" i="0" dirty="0" err="1">
+                <a:solidFill>
+                  <a:srgbClr val="C00000"/>
+                </a:solidFill>
+              </a:rPr>
+              <a:t>ejecutadas</a:t>
+            </a:r>
+            <a:r>
+              <a:rPr sz="1800" b="1" i="0" dirty="0">
+                <a:solidFill>
+                  <a:srgbClr val="C00000"/>
+                </a:solidFill>
+              </a:rPr>
+              <a:t>?</a:t>
             </a:r>
           </a:p>
         </p:txBody>
@@ -3598,44 +3626,24 @@
           <a:p>
             <a:pPr algn="l"/>
             <a:r>
-              <a:rPr lang="es-AR" sz="1700" b="0" i="0" dirty="0">
-                <a:solidFill>
-                  <a:srgbClr val="FFFFFF"/>
-                </a:solidFill>
-              </a:rPr>
+              <a:rPr lang="es-AR" sz="1700" b="0" i="0" dirty="0"/>
               <a:t>Si. El programa levanta una excepción a la vez con </a:t>
             </a:r>
             <a:r>
-              <a:rPr lang="es-AR" sz="1700" b="0" i="0" dirty="0" err="1">
-                <a:solidFill>
-                  <a:srgbClr val="FFFFFF"/>
-                </a:solidFill>
-              </a:rPr>
+              <a:rPr lang="es-AR" sz="1700" b="0" i="0" dirty="0" err="1"/>
               <a:t>feraiseexcept</a:t>
             </a:r>
             <a:r>
-              <a:rPr lang="es-AR" sz="1700" b="0" i="0" dirty="0">
-                <a:solidFill>
-                  <a:srgbClr val="FFFFFF"/>
-                </a:solidFill>
-              </a:rPr>
+              <a:rPr lang="es-AR" sz="1700" b="0" i="0" dirty="0"/>
               <a:t>() y la imprime
 inmediatamente con </a:t>
             </a:r>
             <a:r>
-              <a:rPr lang="es-AR" sz="1700" b="0" i="0" dirty="0" err="1">
-                <a:solidFill>
-                  <a:srgbClr val="FFFFFF"/>
-                </a:solidFill>
-              </a:rPr>
+              <a:rPr lang="es-AR" sz="1700" b="0" i="0" dirty="0" err="1"/>
               <a:t>show_fe_exceptions</a:t>
             </a:r>
             <a:r>
-              <a:rPr lang="es-AR" sz="1700" b="0" i="0" dirty="0">
-                <a:solidFill>
-                  <a:srgbClr val="FFFFFF"/>
-                </a:solidFill>
-              </a:rPr>
+              <a:rPr lang="es-AR" sz="1700" b="0" i="0" dirty="0"/>
               <a:t>().</a:t>
             </a:r>
           </a:p>
@@ -3660,7 +3668,7 @@
             <a:r>
               <a:rPr lang="es-AR" sz="1600" b="0" dirty="0" err="1">
                 <a:solidFill>
-                  <a:srgbClr val="A6E22E"/>
+                  <a:srgbClr val="00B050"/>
                 </a:solidFill>
                 <a:effectLst/>
                 <a:latin typeface="Consolas" panose="020B0609020204030204" pitchFamily="49" charset="0"/>
@@ -3669,9 +3677,6 @@
             </a:r>
             <a:r>
               <a:rPr lang="es-AR" sz="1600" b="0" dirty="0">
-                <a:solidFill>
-                  <a:srgbClr val="F8F8F2"/>
-                </a:solidFill>
                 <a:effectLst/>
                 <a:latin typeface="Consolas" panose="020B0609020204030204" pitchFamily="49" charset="0"/>
               </a:rPr>
@@ -3692,7 +3697,7 @@
             <a:r>
               <a:rPr lang="es-AR" sz="1600" b="0" dirty="0" err="1">
                 <a:solidFill>
-                  <a:srgbClr val="A6E22E"/>
+                  <a:srgbClr val="00B050"/>
                 </a:solidFill>
                 <a:effectLst/>
                 <a:latin typeface="Consolas" panose="020B0609020204030204" pitchFamily="49" charset="0"/>
@@ -3701,9 +3706,6 @@
             </a:r>
             <a:r>
               <a:rPr lang="es-AR" sz="1600" b="0" dirty="0">
-                <a:solidFill>
-                  <a:srgbClr val="F8F8F2"/>
-                </a:solidFill>
                 <a:effectLst/>
                 <a:latin typeface="Consolas" panose="020B0609020204030204" pitchFamily="49" charset="0"/>
               </a:rPr>
@@ -3862,7 +3864,7 @@
             <a:r>
               <a:rPr lang="es-AR" sz="1600" b="0" dirty="0" err="1">
                 <a:solidFill>
-                  <a:srgbClr val="A6E22E"/>
+                  <a:srgbClr val="00B050"/>
                 </a:solidFill>
                 <a:effectLst/>
                 <a:latin typeface="Consolas" panose="020B0609020204030204" pitchFamily="49" charset="0"/>
@@ -3871,9 +3873,6 @@
             </a:r>
             <a:r>
               <a:rPr lang="es-AR" sz="1600" b="0" dirty="0">
-                <a:solidFill>
-                  <a:srgbClr val="F8F8F2"/>
-                </a:solidFill>
                 <a:effectLst/>
                 <a:latin typeface="Consolas" panose="020B0609020204030204" pitchFamily="49" charset="0"/>
               </a:rPr>
@@ -3894,7 +3893,7 @@
             <a:r>
               <a:rPr lang="es-AR" sz="1600" b="0" dirty="0" err="1">
                 <a:solidFill>
-                  <a:srgbClr val="A6E22E"/>
+                  <a:srgbClr val="00B050"/>
                 </a:solidFill>
                 <a:effectLst/>
                 <a:latin typeface="Consolas" panose="020B0609020204030204" pitchFamily="49" charset="0"/>
@@ -3903,64 +3902,38 @@
             </a:r>
             <a:r>
               <a:rPr lang="es-AR" sz="1600" b="0" dirty="0">
-                <a:solidFill>
-                  <a:srgbClr val="F8F8F2"/>
-                </a:solidFill>
                 <a:effectLst/>
                 <a:latin typeface="Consolas" panose="020B0609020204030204" pitchFamily="49" charset="0"/>
               </a:rPr>
-              <a:t>(FE_OVERFLOW </a:t>
-            </a:r>
+              <a:t>(FE_OVERFLOW | FE_INEXACT);</a:t>
+            </a:r>
+          </a:p>
+          <a:p>
             <a:r>
               <a:rPr lang="es-AR" sz="1600" b="0" dirty="0">
                 <a:solidFill>
-                  <a:srgbClr val="F92672"/>
+                  <a:srgbClr val="F8F8F2"/>
                 </a:solidFill>
                 <a:effectLst/>
                 <a:latin typeface="Consolas" panose="020B0609020204030204" pitchFamily="49" charset="0"/>
               </a:rPr>
-              <a:t>|</a:t>
-            </a:r>
-            <a:r>
-              <a:rPr lang="es-AR" sz="1600" b="0" dirty="0">
-                <a:solidFill>
-                  <a:srgbClr val="F8F8F2"/>
+              <a:t>  </a:t>
+            </a:r>
+            <a:r>
+              <a:rPr lang="es-AR" sz="1600" b="0" dirty="0" err="1">
+                <a:solidFill>
+                  <a:srgbClr val="00B050"/>
                 </a:solidFill>
                 <a:effectLst/>
                 <a:latin typeface="Consolas" panose="020B0609020204030204" pitchFamily="49" charset="0"/>
               </a:rPr>
-              <a:t> FE_INEXACT);</a:t>
-            </a:r>
-          </a:p>
-          <a:p>
+              <a:t>show_fe_exceptions</a:t>
+            </a:r>
             <a:r>
               <a:rPr lang="es-AR" sz="1600" b="0" dirty="0">
-                <a:solidFill>
-                  <a:srgbClr val="F8F8F2"/>
-                </a:solidFill>
                 <a:effectLst/>
                 <a:latin typeface="Consolas" panose="020B0609020204030204" pitchFamily="49" charset="0"/>
               </a:rPr>
-              <a:t>  </a:t>
-            </a:r>
-            <a:r>
-              <a:rPr lang="es-AR" sz="1600" b="0" dirty="0" err="1">
-                <a:solidFill>
-                  <a:srgbClr val="A6E22E"/>
-                </a:solidFill>
-                <a:effectLst/>
-                <a:latin typeface="Consolas" panose="020B0609020204030204" pitchFamily="49" charset="0"/>
-              </a:rPr>
-              <a:t>show_fe_exceptions</a:t>
-            </a:r>
-            <a:r>
-              <a:rPr lang="es-AR" sz="1600" b="0" dirty="0">
-                <a:solidFill>
-                  <a:srgbClr val="F8F8F2"/>
-                </a:solidFill>
-                <a:effectLst/>
-                <a:latin typeface="Consolas" panose="020B0609020204030204" pitchFamily="49" charset="0"/>
-              </a:rPr>
               <a:t>();</a:t>
             </a:r>
           </a:p>
@@ -3973,26 +3946,34 @@
                 </a:solidFill>
               </a:rPr>
               <a:t>
-En el primer bloque se levanta FE_INVALID -&gt; aparece en pantalla.
+</a:t>
+            </a:r>
+            <a:r>
+              <a:rPr lang="es-AR" sz="1700" b="0" i="0" dirty="0"/>
+              <a:t>En el primer bloque se levanta FE_INVALID -&gt; aparece en pantalla.
 En el segundo bloque, después de limpiar con </a:t>
             </a:r>
             <a:r>
-              <a:rPr lang="es-AR" sz="1700" b="0" i="0" dirty="0" err="1">
+              <a:rPr lang="es-AR" sz="1700" b="0" i="0" dirty="0" err="1"/>
+              <a:t>feclearexcept</a:t>
+            </a:r>
+            <a:r>
+              <a:rPr lang="es-AR" sz="1700" b="0" i="0" dirty="0"/>
+              <a:t>(), se levantan FE_OVERFLOW
+y FE_INEXACT simultáneamente -&gt; ambas aparecen juntas en consola.</a:t>
+            </a:r>
+            <a:r>
+              <a:rPr lang="es-AR" sz="1700" b="0" i="0" dirty="0">
                 <a:solidFill>
                   <a:srgbClr val="FFFFFF"/>
                 </a:solidFill>
               </a:rPr>
-              <a:t>feclearexcept</a:t>
-            </a:r>
-            <a:r>
-              <a:rPr lang="es-AR" sz="1700" b="0" i="0" dirty="0">
-                <a:solidFill>
-                  <a:srgbClr val="FFFFFF"/>
-                </a:solidFill>
-              </a:rPr>
-              <a:t>(), se levantan FE_OVERFLOW
-y FE_INEXACT simultáneamente -&gt; ambas aparecen juntas en consola.
-El resultado es totalmente consistente con las instrucciones del código.</a:t>
+              <a:t>
+</a:t>
+            </a:r>
+            <a:r>
+              <a:rPr lang="es-AR" sz="1700" b="0" i="0" dirty="0"/>
+              <a:t>El resultado es totalmente consistente con las instrucciones del código.</a:t>
             </a:r>
           </a:p>
         </p:txBody>
@@ -4005,7 +3986,7 @@
         </p:nvSpPr>
         <p:spPr>
           <a:xfrm>
-            <a:off x="1629940" y="5728317"/>
+            <a:off x="575945" y="5760720"/>
             <a:ext cx="8138160" cy="914400"/>
           </a:xfrm>
           <a:prstGeom prst="rect">
@@ -4049,7 +4030,7 @@
         </p:nvSpPr>
         <p:spPr>
           <a:xfrm>
-            <a:off x="1794532" y="5865477"/>
+            <a:off x="740537" y="5901345"/>
             <a:ext cx="7808976" cy="640080"/>
           </a:xfrm>
           <a:prstGeom prst="rect">
@@ -4087,14 +4068,6 @@
 <file path=ppt/slides/slide3.xml><?xml version="1.0" encoding="utf-8"?>
 <p:sld xmlns:a="http://schemas.openxmlformats.org/drawingml/2006/main" xmlns:r="http://schemas.openxmlformats.org/officeDocument/2006/relationships" xmlns:p="http://schemas.openxmlformats.org/presentationml/2006/main">
   <p:cSld>
-    <p:bg>
-      <p:bgPr>
-        <a:solidFill>
-          <a:srgbClr val="1E1E2E"/>
-        </a:solidFill>
-        <a:effectLst/>
-      </p:bgPr>
-    </p:bg>
     <p:spTree>
       <p:nvGrpSpPr>
         <p:cNvPr id="1" name=""/>
@@ -4239,8 +4212,8 @@
         </p:nvSpPr>
         <p:spPr>
           <a:xfrm>
-            <a:off x="365760" y="1005840"/>
-            <a:ext cx="11430000" cy="457200"/>
+            <a:off x="351202" y="1005840"/>
+            <a:ext cx="11430000" cy="369332"/>
           </a:xfrm>
           <a:prstGeom prst="rect">
             <a:avLst/>
@@ -4255,12 +4228,76 @@
           <a:p>
             <a:pPr algn="l"/>
             <a:r>
-              <a:rPr sz="1800" b="1" i="0">
-                <a:solidFill>
-                  <a:srgbClr val="F9E2AF"/>
-                </a:solidFill>
-              </a:rPr>
-              <a:t>Que se observa? Cual es la funcion de feenableexcept()?</a:t>
+              <a:rPr sz="1800" b="1" i="0" dirty="0">
+                <a:solidFill>
+                  <a:srgbClr val="C00000"/>
+                </a:solidFill>
+              </a:rPr>
+              <a:t>Que se </a:t>
+            </a:r>
+            <a:r>
+              <a:rPr sz="1800" b="1" i="0" dirty="0" err="1">
+                <a:solidFill>
+                  <a:srgbClr val="C00000"/>
+                </a:solidFill>
+              </a:rPr>
+              <a:t>observa</a:t>
+            </a:r>
+            <a:r>
+              <a:rPr sz="1800" b="1" i="0" dirty="0">
+                <a:solidFill>
+                  <a:srgbClr val="C00000"/>
+                </a:solidFill>
+              </a:rPr>
+              <a:t>? </a:t>
+            </a:r>
+            <a:r>
+              <a:rPr sz="1800" b="1" i="0" dirty="0" err="1">
+                <a:solidFill>
+                  <a:srgbClr val="C00000"/>
+                </a:solidFill>
+              </a:rPr>
+              <a:t>Cual</a:t>
+            </a:r>
+            <a:r>
+              <a:rPr sz="1800" b="1" i="0" dirty="0">
+                <a:solidFill>
+                  <a:srgbClr val="C00000"/>
+                </a:solidFill>
+              </a:rPr>
+              <a:t> es la </a:t>
+            </a:r>
+            <a:r>
+              <a:rPr sz="1800" b="1" i="0" dirty="0" err="1">
+                <a:solidFill>
+                  <a:srgbClr val="C00000"/>
+                </a:solidFill>
+              </a:rPr>
+              <a:t>funcion</a:t>
+            </a:r>
+            <a:r>
+              <a:rPr sz="1800" b="1" i="0" dirty="0">
+                <a:solidFill>
+                  <a:srgbClr val="C00000"/>
+                </a:solidFill>
+              </a:rPr>
+              <a:t> de </a:t>
+            </a:r>
+            <a:r>
+              <a:rPr sz="1800" b="1" i="0" dirty="0" err="1">
+                <a:solidFill>
+                  <a:srgbClr val="C00000"/>
+                </a:solidFill>
+              </a:rPr>
+              <a:t>feenableexcept</a:t>
+            </a:r>
+            <a:r>
+              <a:rPr sz="1800" b="1" i="0" dirty="0">
+                <a:solidFill>
+                  <a:srgbClr val="C00000"/>
+                </a:solidFill>
+              </a:rPr>
+              <a:t>()?</a:t>
             </a:r>
           </a:p>
         </p:txBody>
@@ -4289,76 +4326,40 @@
           <a:p>
             <a:pPr algn="l"/>
             <a:r>
-              <a:rPr lang="es-AR" sz="1700" b="0" i="0" dirty="0">
-                <a:solidFill>
-                  <a:srgbClr val="FFFFFF"/>
-                </a:solidFill>
-              </a:rPr>
+              <a:rPr lang="es-AR" sz="1700" b="0" i="0" dirty="0"/>
               <a:t>Al activar </a:t>
             </a:r>
             <a:r>
-              <a:rPr lang="es-AR" sz="1700" b="0" i="0" dirty="0" err="1">
-                <a:solidFill>
-                  <a:srgbClr val="FFFFFF"/>
-                </a:solidFill>
-              </a:rPr>
+              <a:rPr lang="es-AR" sz="1700" b="0" i="0" dirty="0" err="1"/>
               <a:t>feenableexcept</a:t>
             </a:r>
             <a:r>
-              <a:rPr lang="es-AR" sz="1700" b="0" i="0" dirty="0">
-                <a:solidFill>
-                  <a:srgbClr val="FFFFFF"/>
-                </a:solidFill>
-              </a:rPr>
+              <a:rPr lang="es-AR" sz="1700" b="0" i="0" dirty="0"/>
               <a:t>(FE_ALL_EXCEPT) sin un </a:t>
             </a:r>
             <a:r>
-              <a:rPr lang="es-AR" sz="1700" b="0" i="0" dirty="0" err="1">
-                <a:solidFill>
-                  <a:srgbClr val="FFFFFF"/>
-                </a:solidFill>
-              </a:rPr>
+              <a:rPr lang="es-AR" sz="1700" b="0" i="0" dirty="0" err="1"/>
               <a:t>handler</a:t>
             </a:r>
             <a:r>
-              <a:rPr lang="es-AR" sz="1700" b="0" i="0" dirty="0">
-                <a:solidFill>
-                  <a:srgbClr val="FFFFFF"/>
-                </a:solidFill>
-              </a:rPr>
+              <a:rPr lang="es-AR" sz="1700" b="0" i="0" dirty="0"/>
               <a:t> instalado,
 el programa termina de forma abrupta con </a:t>
             </a:r>
             <a:r>
-              <a:rPr lang="es-AR" sz="1700" b="0" i="0" dirty="0" err="1">
-                <a:solidFill>
-                  <a:srgbClr val="FFFFFF"/>
-                </a:solidFill>
-              </a:rPr>
+              <a:rPr lang="es-AR" sz="1700" b="0" i="0" dirty="0" err="1"/>
               <a:t>exit</a:t>
             </a:r>
             <a:r>
-              <a:rPr lang="es-AR" sz="1700" b="0" i="0" dirty="0">
-                <a:solidFill>
-                  <a:srgbClr val="FFFFFF"/>
-                </a:solidFill>
-              </a:rPr>
+              <a:rPr lang="es-AR" sz="1700" b="0" i="0" dirty="0"/>
               <a:t> </a:t>
             </a:r>
             <a:r>
-              <a:rPr lang="es-AR" sz="1700" b="0" i="0" dirty="0" err="1">
-                <a:solidFill>
-                  <a:srgbClr val="FFFFFF"/>
-                </a:solidFill>
-              </a:rPr>
+              <a:rPr lang="es-AR" sz="1700" b="0" i="0" dirty="0" err="1"/>
               <a:t>code</a:t>
             </a:r>
             <a:r>
-              <a:rPr lang="es-AR" sz="1700" b="0" i="0" dirty="0">
-                <a:solidFill>
-                  <a:srgbClr val="FFFFFF"/>
-                </a:solidFill>
-              </a:rPr>
+              <a:rPr lang="es-AR" sz="1700" b="0" i="0" dirty="0"/>
               <a:t> 136.</a:t>
             </a:r>
           </a:p>
@@ -4384,7 +4385,7 @@
             <a:r>
               <a:rPr lang="es-AR" sz="1600" b="0" dirty="0" err="1">
                 <a:solidFill>
-                  <a:srgbClr val="A6E22E"/>
+                  <a:srgbClr val="00B050"/>
                 </a:solidFill>
                 <a:effectLst/>
                 <a:latin typeface="Consolas" panose="020B0609020204030204" pitchFamily="49" charset="0"/>
@@ -4399,38 +4400,42 @@
                 <a:effectLst/>
                 <a:latin typeface="Consolas" panose="020B0609020204030204" pitchFamily="49" charset="0"/>
               </a:rPr>
-              <a:t> (FE_ALL_EXCEPT);</a:t>
-            </a:r>
-          </a:p>
-          <a:p>
+              <a:t> </a:t>
+            </a:r>
             <a:r>
               <a:rPr lang="es-AR" sz="1600" b="0" dirty="0">
-                <a:solidFill>
-                  <a:srgbClr val="F8F8F2"/>
-                </a:solidFill>
                 <a:effectLst/>
                 <a:latin typeface="Consolas" panose="020B0609020204030204" pitchFamily="49" charset="0"/>
               </a:rPr>
-              <a:t>  </a:t>
-            </a:r>
-            <a:r>
-              <a:rPr lang="es-AR" sz="1600" b="0" dirty="0" err="1">
-                <a:solidFill>
-                  <a:srgbClr val="A6E22E"/>
+              <a:t>(FE_ALL_EXCEPT);</a:t>
+            </a:r>
+          </a:p>
+          <a:p>
+            <a:r>
+              <a:rPr lang="es-AR" sz="1600" b="0" dirty="0">
+                <a:solidFill>
+                  <a:srgbClr val="F8F8F2"/>
                 </a:solidFill>
                 <a:effectLst/>
                 <a:latin typeface="Consolas" panose="020B0609020204030204" pitchFamily="49" charset="0"/>
               </a:rPr>
-              <a:t>feenableexcept</a:t>
-            </a:r>
-            <a:r>
-              <a:rPr lang="es-AR" sz="1600" b="0" dirty="0">
-                <a:solidFill>
-                  <a:srgbClr val="F8F8F2"/>
+              <a:t>  </a:t>
+            </a:r>
+            <a:r>
+              <a:rPr lang="es-AR" sz="1600" b="0" dirty="0" err="1">
+                <a:solidFill>
+                  <a:srgbClr val="00B050"/>
                 </a:solidFill>
                 <a:effectLst/>
                 <a:latin typeface="Consolas" panose="020B0609020204030204" pitchFamily="49" charset="0"/>
               </a:rPr>
+              <a:t>feenableexcept</a:t>
+            </a:r>
+            <a:r>
+              <a:rPr lang="es-AR" sz="1600" b="0" dirty="0">
+                <a:effectLst/>
+                <a:latin typeface="Consolas" panose="020B0609020204030204" pitchFamily="49" charset="0"/>
+              </a:rPr>
               <a:t>(FE_ALL_EXCEPT); </a:t>
             </a:r>
           </a:p>
@@ -4443,88 +4448,52 @@
                 </a:solidFill>
               </a:rPr>
               <a:t>
-El código 136 corresponde a SIGFPE (</a:t>
-            </a:r>
-            <a:r>
-              <a:rPr lang="es-AR" sz="1700" b="0" i="0" dirty="0" err="1">
-                <a:solidFill>
-                  <a:srgbClr val="FFFFFF"/>
-                </a:solidFill>
-              </a:rPr>
+</a:t>
+            </a:r>
+            <a:r>
+              <a:rPr lang="es-AR" sz="1700" b="0" i="0" dirty="0"/>
+              <a:t>El código 136 corresponde a SIGFPE (</a:t>
+            </a:r>
+            <a:r>
+              <a:rPr lang="es-AR" sz="1700" b="0" i="0" dirty="0" err="1"/>
               <a:t>Floating</a:t>
             </a:r>
             <a:r>
-              <a:rPr lang="es-AR" sz="1700" b="0" i="0" dirty="0">
-                <a:solidFill>
-                  <a:srgbClr val="FFFFFF"/>
-                </a:solidFill>
-              </a:rPr>
+              <a:rPr lang="es-AR" sz="1700" b="0" i="0" dirty="0"/>
               <a:t> Point </a:t>
             </a:r>
             <a:r>
-              <a:rPr lang="es-AR" sz="1700" b="0" i="0" dirty="0" err="1">
-                <a:solidFill>
-                  <a:srgbClr val="FFFFFF"/>
-                </a:solidFill>
-              </a:rPr>
+              <a:rPr lang="es-AR" sz="1700" b="0" i="0" dirty="0" err="1"/>
               <a:t>Exception</a:t>
             </a:r>
             <a:r>
-              <a:rPr lang="es-AR" sz="1700" b="0" i="0" dirty="0">
-                <a:solidFill>
-                  <a:srgbClr val="FFFFFF"/>
-                </a:solidFill>
-              </a:rPr>
+              <a:rPr lang="es-AR" sz="1700" b="0" i="0" dirty="0"/>
               <a:t>).
 </a:t>
             </a:r>
             <a:r>
-              <a:rPr lang="es-AR" sz="1700" b="0" i="0" dirty="0" err="1">
-                <a:solidFill>
-                  <a:srgbClr val="FFFFFF"/>
-                </a:solidFill>
-              </a:rPr>
+              <a:rPr lang="es-AR" sz="1700" b="0" i="0" dirty="0" err="1"/>
               <a:t>feenableexcept</a:t>
             </a:r>
             <a:r>
-              <a:rPr lang="es-AR" sz="1700" b="0" i="0" dirty="0">
-                <a:solidFill>
-                  <a:srgbClr val="FFFFFF"/>
-                </a:solidFill>
-              </a:rPr>
+              <a:rPr lang="es-AR" sz="1700" b="0" i="0" dirty="0"/>
               <a:t>() le ordena al hardware que emita una interrupción activa (SIGFPE)
 cada vez que ocurre un error de punto flotante. Como no hay </a:t>
             </a:r>
             <a:r>
-              <a:rPr lang="es-AR" sz="1700" b="0" i="0" dirty="0" err="1">
-                <a:solidFill>
-                  <a:srgbClr val="FFFFFF"/>
-                </a:solidFill>
-              </a:rPr>
+              <a:rPr lang="es-AR" sz="1700" b="0" i="0" dirty="0" err="1"/>
               <a:t>handler</a:t>
             </a:r>
             <a:r>
-              <a:rPr lang="es-AR" sz="1700" b="0" i="0" dirty="0">
-                <a:solidFill>
-                  <a:srgbClr val="FFFFFF"/>
-                </a:solidFill>
-              </a:rPr>
+              <a:rPr lang="es-AR" sz="1700" b="0" i="0" dirty="0"/>
               <a:t>, se interrum</a:t>
             </a:r>
             <a:r>
-              <a:rPr lang="es-AR" sz="1700" dirty="0">
-                <a:solidFill>
-                  <a:srgbClr val="FFFFFF"/>
-                </a:solidFill>
-              </a:rPr>
+              <a:rPr lang="es-AR" sz="1700" dirty="0"/>
               <a:t>pe el proceso</a:t>
             </a:r>
             <a:r>
-              <a:rPr lang="es-AR" sz="1700" b="0" i="0" dirty="0">
-                <a:solidFill>
-                  <a:srgbClr val="FFFFFF"/>
-                </a:solidFill>
-              </a:rPr>
+              <a:rPr lang="es-AR" sz="1700" b="0" i="0" dirty="0"/>
               <a:t>.</a:t>
             </a:r>
           </a:p>
@@ -4624,7 +4593,7 @@
             <a:avLst/>
           </a:prstGeom>
           <a:solidFill>
-            <a:srgbClr val="313244"/>
+            <a:schemeClr val="bg1"/>
           </a:solidFill>
           <a:ln>
             <a:noFill/>
@@ -4662,7 +4631,7 @@
         <p:spPr>
           <a:xfrm>
             <a:off x="640080" y="5440680"/>
-            <a:ext cx="5486400" cy="411480"/>
+            <a:ext cx="5486400" cy="369332"/>
           </a:xfrm>
           <a:prstGeom prst="rect">
             <a:avLst/>
@@ -4677,12 +4646,36 @@
           <a:p>
             <a:pPr algn="l"/>
             <a:r>
-              <a:rPr sz="1400" b="1" i="0">
-                <a:solidFill>
-                  <a:srgbClr val="89B4FA"/>
-                </a:solidFill>
-              </a:rPr>
-              <a:t>Funcion de feenableexcept():</a:t>
+              <a:rPr b="1" i="0" dirty="0" err="1">
+                <a:solidFill>
+                  <a:srgbClr val="00B0F0"/>
+                </a:solidFill>
+              </a:rPr>
+              <a:t>Funcion</a:t>
+            </a:r>
+            <a:r>
+              <a:rPr b="1" i="0" dirty="0">
+                <a:solidFill>
+                  <a:srgbClr val="00B0F0"/>
+                </a:solidFill>
+              </a:rPr>
+              <a:t> de </a:t>
+            </a:r>
+            <a:r>
+              <a:rPr b="1" i="0" dirty="0" err="1">
+                <a:solidFill>
+                  <a:srgbClr val="00B0F0"/>
+                </a:solidFill>
+              </a:rPr>
+              <a:t>feenableexcept</a:t>
+            </a:r>
+            <a:r>
+              <a:rPr b="1" i="0" dirty="0">
+                <a:solidFill>
+                  <a:srgbClr val="00B0F0"/>
+                </a:solidFill>
+              </a:rPr>
+              <a:t>():</a:t>
             </a:r>
           </a:p>
         </p:txBody>
@@ -4696,7 +4689,7 @@
         <p:spPr>
           <a:xfrm>
             <a:off x="640080" y="5833872"/>
-            <a:ext cx="10972800" cy="507831"/>
+            <a:ext cx="10972800" cy="584775"/>
           </a:xfrm>
           <a:prstGeom prst="rect">
             <a:avLst/>
@@ -4711,147 +4704,75 @@
           <a:p>
             <a:pPr algn="l"/>
             <a:r>
-              <a:rPr sz="1300" b="0" i="0" dirty="0" err="1">
-                <a:solidFill>
-                  <a:srgbClr val="BAC2DE"/>
-                </a:solidFill>
-              </a:rPr>
+              <a:rPr sz="1600" b="0" i="0" dirty="0" err="1"/>
               <a:t>Desenenmascara</a:t>
             </a:r>
             <a:r>
-              <a:rPr sz="1300" b="0" i="0" dirty="0">
-                <a:solidFill>
-                  <a:srgbClr val="BAC2DE"/>
-                </a:solidFill>
-              </a:rPr>
+              <a:rPr sz="1600" b="0" i="0" dirty="0"/>
               <a:t> las </a:t>
             </a:r>
             <a:r>
-              <a:rPr sz="1300" b="0" i="0" dirty="0" err="1">
-                <a:solidFill>
-                  <a:srgbClr val="BAC2DE"/>
-                </a:solidFill>
-              </a:rPr>
+              <a:rPr sz="1600" b="0" i="0" dirty="0" err="1"/>
               <a:t>excepciones</a:t>
             </a:r>
             <a:r>
-              <a:rPr sz="1300" b="0" i="0" dirty="0">
-                <a:solidFill>
-                  <a:srgbClr val="BAC2DE"/>
-                </a:solidFill>
-              </a:rPr>
+              <a:rPr sz="1600" b="0" i="0" dirty="0"/>
               <a:t> del FPU. Las </a:t>
             </a:r>
             <a:r>
-              <a:rPr sz="1300" b="0" i="0" dirty="0" err="1">
-                <a:solidFill>
-                  <a:srgbClr val="BAC2DE"/>
-                </a:solidFill>
-              </a:rPr>
+              <a:rPr sz="1600" b="0" i="0" dirty="0" err="1"/>
               <a:t>convierte</a:t>
             </a:r>
             <a:r>
-              <a:rPr sz="1300" b="0" i="0" dirty="0">
-                <a:solidFill>
-                  <a:srgbClr val="BAC2DE"/>
-                </a:solidFill>
-              </a:rPr>
+              <a:rPr sz="1600" b="0" i="0" dirty="0"/>
               <a:t> de modo </a:t>
             </a:r>
             <a:r>
-              <a:rPr sz="1300" b="0" i="0" dirty="0" err="1">
-                <a:solidFill>
-                  <a:srgbClr val="BAC2DE"/>
-                </a:solidFill>
-              </a:rPr>
+              <a:rPr sz="1600" b="0" i="0" dirty="0" err="1"/>
               <a:t>pasivo</a:t>
             </a:r>
             <a:r>
-              <a:rPr sz="1300" b="0" i="0" dirty="0">
-                <a:solidFill>
-                  <a:srgbClr val="BAC2DE"/>
-                </a:solidFill>
-              </a:rPr>
+              <a:rPr sz="1600" b="0" i="0" dirty="0"/>
               <a:t> (</a:t>
             </a:r>
             <a:r>
-              <a:rPr lang="es-MX" sz="1300" dirty="0">
-                <a:solidFill>
-                  <a:srgbClr val="BAC2DE"/>
-                </a:solidFill>
-              </a:rPr>
+              <a:rPr lang="es-MX" sz="1600" dirty="0"/>
               <a:t>se activan </a:t>
             </a:r>
             <a:r>
-              <a:rPr lang="es-MX" sz="1300" dirty="0" err="1">
-                <a:solidFill>
-                  <a:srgbClr val="BAC2DE"/>
-                </a:solidFill>
-              </a:rPr>
+              <a:rPr lang="es-MX" sz="1600" dirty="0" err="1"/>
               <a:t>flags</a:t>
             </a:r>
             <a:r>
-              <a:rPr lang="es-MX" sz="1300" dirty="0">
-                <a:solidFill>
-                  <a:srgbClr val="BAC2DE"/>
-                </a:solidFill>
-              </a:rPr>
+              <a:rPr lang="es-MX" sz="1600" dirty="0"/>
               <a:t> internas del FPU sin interrumpir el programa</a:t>
             </a:r>
             <a:r>
-              <a:rPr sz="1300" b="0" i="0" dirty="0">
-                <a:solidFill>
-                  <a:srgbClr val="BAC2DE"/>
-                </a:solidFill>
-              </a:rPr>
+              <a:rPr sz="1600" b="0" i="0" dirty="0"/>
               <a:t>) a modo </a:t>
             </a:r>
             <a:r>
-              <a:rPr sz="1300" b="0" i="0" dirty="0" err="1">
-                <a:solidFill>
-                  <a:srgbClr val="BAC2DE"/>
-                </a:solidFill>
-              </a:rPr>
+              <a:rPr sz="1600" b="0" i="0" dirty="0" err="1"/>
               <a:t>activo</a:t>
             </a:r>
             <a:r>
-              <a:rPr sz="1300" b="0" i="0" dirty="0">
-                <a:solidFill>
-                  <a:srgbClr val="BAC2DE"/>
-                </a:solidFill>
-              </a:rPr>
+              <a:rPr sz="1600" b="0" i="0" dirty="0"/>
               <a:t> (</a:t>
             </a:r>
             <a:r>
-              <a:rPr sz="1300" b="0" i="0" dirty="0" err="1">
-                <a:solidFill>
-                  <a:srgbClr val="BAC2DE"/>
-                </a:solidFill>
-              </a:rPr>
+              <a:rPr sz="1600" b="0" i="0" dirty="0" err="1"/>
               <a:t>emite</a:t>
             </a:r>
             <a:r>
-              <a:rPr sz="1300" b="0" i="0" dirty="0">
-                <a:solidFill>
-                  <a:srgbClr val="BAC2DE"/>
-                </a:solidFill>
-              </a:rPr>
+              <a:rPr sz="1600" b="0" i="0" dirty="0"/>
               <a:t> SIGFPE </a:t>
             </a:r>
             <a:r>
-              <a:rPr sz="1300" b="0" i="0" dirty="0" err="1">
-                <a:solidFill>
-                  <a:srgbClr val="BAC2DE"/>
-                </a:solidFill>
-              </a:rPr>
+              <a:rPr sz="1600" b="0" i="0" dirty="0" err="1"/>
               <a:t>inmediatamente</a:t>
             </a:r>
             <a:r>
-              <a:rPr sz="1300" b="0" i="0" dirty="0">
-                <a:solidFill>
-                  <a:srgbClr val="BAC2DE"/>
-                </a:solidFill>
-              </a:rPr>
+              <a:rPr sz="1600" b="0" i="0" dirty="0"/>
               <a:t>).</a:t>
             </a:r>
           </a:p>
@@ -4868,14 +4789,6 @@
 <file path=ppt/slides/slide4.xml><?xml version="1.0" encoding="utf-8"?>
 <p:sld xmlns:a="http://schemas.openxmlformats.org/drawingml/2006/main" xmlns:r="http://schemas.openxmlformats.org/officeDocument/2006/relationships" xmlns:p="http://schemas.openxmlformats.org/presentationml/2006/main">
   <p:cSld>
-    <p:bg>
-      <p:bgPr>
-        <a:solidFill>
-          <a:srgbClr val="1E1E2E"/>
-        </a:solidFill>
-        <a:effectLst/>
-      </p:bgPr>
-    </p:bg>
     <p:spTree>
       <p:nvGrpSpPr>
         <p:cNvPr id="1" name=""/>
@@ -5038,7 +4951,7 @@
             <a:r>
               <a:rPr lang="es-AR" sz="1800" b="1" i="0" dirty="0">
                 <a:solidFill>
-                  <a:srgbClr val="F9E2AF"/>
+                  <a:srgbClr val="C00000"/>
                 </a:solidFill>
               </a:rPr>
               <a:t>Que se observa? Cual es el objetivo de </a:t>
@@ -5046,7 +4959,7 @@
             <a:r>
               <a:rPr lang="es-AR" sz="1800" b="1" i="0" dirty="0" err="1">
                 <a:solidFill>
-                  <a:srgbClr val="F9E2AF"/>
+                  <a:srgbClr val="C00000"/>
                 </a:solidFill>
               </a:rPr>
               <a:t>signal</a:t>
@@ -5054,7 +4967,7 @@
             <a:r>
               <a:rPr lang="es-AR" sz="1800" b="1" i="0" dirty="0">
                 <a:solidFill>
-                  <a:srgbClr val="F9E2AF"/>
+                  <a:srgbClr val="C00000"/>
                 </a:solidFill>
               </a:rPr>
               <a:t>()?</a:t>
@@ -5086,126 +4999,66 @@
           <a:p>
             <a:pPr algn="l"/>
             <a:r>
-              <a:rPr lang="es-AR" sz="1700" b="0" i="0" dirty="0">
-                <a:solidFill>
-                  <a:srgbClr val="FFFFFF"/>
-                </a:solidFill>
-              </a:rPr>
+              <a:rPr lang="es-AR" sz="1700" b="0" i="0" dirty="0"/>
               <a:t>Al registrar </a:t>
             </a:r>
             <a:r>
-              <a:rPr lang="es-AR" sz="1700" b="0" i="0" dirty="0" err="1">
-                <a:solidFill>
-                  <a:srgbClr val="FFFFFF"/>
-                </a:solidFill>
-              </a:rPr>
+              <a:rPr lang="es-AR" sz="1700" b="0" i="0" dirty="0" err="1"/>
               <a:t>fpe_handler</a:t>
             </a:r>
             <a:r>
-              <a:rPr lang="es-AR" sz="1700" b="0" i="0" dirty="0">
-                <a:solidFill>
-                  <a:srgbClr val="FFFFFF"/>
-                </a:solidFill>
-              </a:rPr>
+              <a:rPr lang="es-AR" sz="1700" b="0" i="0" dirty="0"/>
               <a:t> con </a:t>
             </a:r>
             <a:r>
-              <a:rPr lang="es-AR" sz="1700" b="0" i="0" dirty="0" err="1">
-                <a:solidFill>
-                  <a:srgbClr val="FFFFFF"/>
-                </a:solidFill>
-              </a:rPr>
+              <a:rPr lang="es-AR" sz="1700" b="0" i="0" dirty="0" err="1"/>
               <a:t>signal</a:t>
             </a:r>
             <a:r>
-              <a:rPr lang="es-AR" sz="1700" b="0" i="0" dirty="0">
-                <a:solidFill>
-                  <a:srgbClr val="FFFFFF"/>
-                </a:solidFill>
-              </a:rPr>
+              <a:rPr lang="es-AR" sz="1700" b="0" i="0" dirty="0"/>
               <a:t>(), cuando ocurre la excepción el sistema
 operativo interrumpe el programa y llama a </a:t>
             </a:r>
             <a:r>
-              <a:rPr lang="es-AR" sz="1700" b="0" i="0" dirty="0" err="1">
-                <a:solidFill>
-                  <a:srgbClr val="FFFFFF"/>
-                </a:solidFill>
-              </a:rPr>
+              <a:rPr lang="es-AR" sz="1700" b="0" i="0" dirty="0" err="1"/>
               <a:t>fpe_handler</a:t>
             </a:r>
             <a:r>
-              <a:rPr lang="es-AR" sz="1700" b="0" i="0" dirty="0">
-                <a:solidFill>
-                  <a:srgbClr val="FFFFFF"/>
-                </a:solidFill>
-              </a:rPr>
+              <a:rPr lang="es-AR" sz="1700" b="0" i="0" dirty="0"/>
               <a:t>() en lugar de cerrarlo.
 El programa ya no termina con </a:t>
             </a:r>
             <a:r>
-              <a:rPr lang="es-AR" sz="1700" b="0" i="0" dirty="0" err="1">
-                <a:solidFill>
-                  <a:srgbClr val="FFFFFF"/>
-                </a:solidFill>
-              </a:rPr>
+              <a:rPr lang="es-AR" sz="1700" b="0" i="0" dirty="0" err="1"/>
               <a:t>exit</a:t>
             </a:r>
             <a:r>
-              <a:rPr lang="es-AR" sz="1700" b="0" i="0" dirty="0">
-                <a:solidFill>
-                  <a:srgbClr val="FFFFFF"/>
-                </a:solidFill>
-              </a:rPr>
+              <a:rPr lang="es-AR" sz="1700" b="0" i="0" dirty="0"/>
               <a:t> 136 (</a:t>
             </a:r>
             <a:r>
-              <a:rPr lang="es-AR" sz="1700" b="0" i="0" dirty="0" err="1">
-                <a:solidFill>
-                  <a:srgbClr val="FFFFFF"/>
-                </a:solidFill>
-              </a:rPr>
+              <a:rPr lang="es-AR" sz="1700" b="0" i="0" dirty="0" err="1"/>
               <a:t>crash</a:t>
             </a:r>
             <a:r>
-              <a:rPr lang="es-AR" sz="1700" b="0" i="0" dirty="0">
-                <a:solidFill>
-                  <a:srgbClr val="FFFFFF"/>
-                </a:solidFill>
-              </a:rPr>
+              <a:rPr lang="es-AR" sz="1700" b="0" i="0" dirty="0"/>
               <a:t>), sino con </a:t>
             </a:r>
             <a:r>
-              <a:rPr lang="es-AR" sz="1700" b="0" i="0" dirty="0" err="1">
-                <a:solidFill>
-                  <a:srgbClr val="FFFFFF"/>
-                </a:solidFill>
-              </a:rPr>
+              <a:rPr lang="es-AR" sz="1700" b="0" i="0" dirty="0" err="1"/>
               <a:t>exit</a:t>
             </a:r>
             <a:r>
-              <a:rPr lang="es-AR" sz="1700" b="0" i="0" dirty="0">
-                <a:solidFill>
-                  <a:srgbClr val="FFFFFF"/>
-                </a:solidFill>
-              </a:rPr>
+              <a:rPr lang="es-AR" sz="1700" b="0" i="0" dirty="0"/>
               <a:t> 1 (EXIT_FAILURE),
 porque es el propio código quien llama a </a:t>
             </a:r>
             <a:r>
-              <a:rPr lang="es-AR" sz="1700" b="0" i="0" dirty="0" err="1">
-                <a:solidFill>
-                  <a:srgbClr val="FFFFFF"/>
-                </a:solidFill>
-              </a:rPr>
+              <a:rPr lang="es-AR" sz="1700" b="0" i="0" dirty="0" err="1"/>
               <a:t>exit</a:t>
             </a:r>
             <a:r>
-              <a:rPr lang="es-AR" sz="1700" b="0" i="0" dirty="0">
-                <a:solidFill>
-                  <a:srgbClr val="FFFFFF"/>
-                </a:solidFill>
-              </a:rPr>
+              <a:rPr lang="es-AR" sz="1700" b="0" i="0" dirty="0"/>
               <a:t>() de forma controlada.</a:t>
             </a:r>
           </a:p>
@@ -5219,7 +5072,7 @@
         </p:nvSpPr>
         <p:spPr>
           <a:xfrm>
-            <a:off x="2011680" y="3648456"/>
+            <a:off x="548640" y="3429000"/>
             <a:ext cx="8138160" cy="1417320"/>
           </a:xfrm>
           <a:prstGeom prst="rect">
@@ -5263,7 +5116,7 @@
         </p:nvSpPr>
         <p:spPr>
           <a:xfrm>
-            <a:off x="2176272" y="3785616"/>
+            <a:off x="713232" y="3566160"/>
             <a:ext cx="7808976" cy="1143000"/>
           </a:xfrm>
           <a:prstGeom prst="rect">
@@ -5307,7 +5160,7 @@
             <a:avLst/>
           </a:prstGeom>
           <a:solidFill>
-            <a:srgbClr val="313244"/>
+            <a:schemeClr val="bg1"/>
           </a:solidFill>
           <a:ln>
             <a:noFill/>
@@ -5345,7 +5198,7 @@
         <p:spPr>
           <a:xfrm>
             <a:off x="640080" y="5495544"/>
-            <a:ext cx="4572000" cy="307777"/>
+            <a:ext cx="4572000" cy="369332"/>
           </a:xfrm>
           <a:prstGeom prst="rect">
             <a:avLst/>
@@ -5360,7 +5213,7 @@
           <a:p>
             <a:pPr algn="l"/>
             <a:r>
-              <a:rPr lang="es-AR" sz="1400" b="1" i="0" dirty="0">
+              <a:rPr lang="es-AR" b="1" i="0" dirty="0">
                 <a:solidFill>
                   <a:srgbClr val="89B4FA"/>
                 </a:solidFill>
@@ -5368,7 +5221,7 @@
               <a:t>Por que muestra </a:t>
             </a:r>
             <a:r>
-              <a:rPr lang="es-AR" sz="1400" b="1" i="0" dirty="0" err="1">
+              <a:rPr lang="es-AR" b="1" i="0" dirty="0" err="1">
                 <a:solidFill>
                   <a:srgbClr val="89B4FA"/>
                 </a:solidFill>
@@ -5376,7 +5229,7 @@
               <a:t>none</a:t>
             </a:r>
             <a:r>
-              <a:rPr lang="es-AR" sz="1400" b="1" i="0" dirty="0">
+              <a:rPr lang="es-AR" b="1" i="0" dirty="0">
                 <a:solidFill>
                   <a:srgbClr val="89B4FA"/>
                 </a:solidFill>
@@ -5395,7 +5248,7 @@
         <p:spPr>
           <a:xfrm>
             <a:off x="640080" y="5797296"/>
-            <a:ext cx="10972800" cy="492443"/>
+            <a:ext cx="10972800" cy="584775"/>
           </a:xfrm>
           <a:prstGeom prst="rect">
             <a:avLst/>
@@ -5410,43 +5263,23 @@
           <a:p>
             <a:pPr algn="l"/>
             <a:r>
-              <a:rPr lang="es-AR" sz="1300" b="0" i="0" dirty="0">
-                <a:solidFill>
-                  <a:srgbClr val="BAC2DE"/>
-                </a:solidFill>
-              </a:rPr>
+              <a:rPr lang="es-AR" sz="1600" b="0" i="0" dirty="0"/>
               <a:t>En Linux, la señal SIGFPE es entregada tan rápido que las banderas del FPU aun no se propagaron al registro que lee </a:t>
             </a:r>
             <a:r>
-              <a:rPr lang="es-AR" sz="1300" b="0" i="0" dirty="0" err="1">
-                <a:solidFill>
-                  <a:srgbClr val="BAC2DE"/>
-                </a:solidFill>
-              </a:rPr>
+              <a:rPr lang="es-AR" sz="1600" b="0" i="0" dirty="0" err="1"/>
               <a:t>fetestexcept</a:t>
             </a:r>
             <a:r>
-              <a:rPr lang="es-AR" sz="1300" b="0" i="0" dirty="0">
-                <a:solidFill>
-                  <a:srgbClr val="BAC2DE"/>
-                </a:solidFill>
-              </a:rPr>
+              <a:rPr lang="es-AR" sz="1600" b="0" i="0" dirty="0"/>
               <a:t>(). Comportamiento del </a:t>
             </a:r>
             <a:r>
-              <a:rPr lang="es-AR" sz="1300" b="0" i="0" dirty="0" err="1">
-                <a:solidFill>
-                  <a:srgbClr val="BAC2DE"/>
-                </a:solidFill>
-              </a:rPr>
+              <a:rPr lang="es-AR" sz="1600" b="0" i="0" dirty="0" err="1"/>
               <a:t>kernel</a:t>
             </a:r>
             <a:r>
-              <a:rPr lang="es-AR" sz="1300" b="0" i="0" dirty="0">
-                <a:solidFill>
-                  <a:srgbClr val="BAC2DE"/>
-                </a:solidFill>
-              </a:rPr>
+              <a:rPr lang="es-AR" sz="1600" b="0" i="0" dirty="0"/>
               <a:t> Linux.</a:t>
             </a:r>
           </a:p>
@@ -5463,14 +5296,6 @@
 <file path=ppt/slides/slide5.xml><?xml version="1.0" encoding="utf-8"?>
 <p:sld xmlns:a="http://schemas.openxmlformats.org/drawingml/2006/main" xmlns:r="http://schemas.openxmlformats.org/officeDocument/2006/relationships" xmlns:p="http://schemas.openxmlformats.org/presentationml/2006/main">
   <p:cSld>
-    <p:bg>
-      <p:bgPr>
-        <a:solidFill>
-          <a:srgbClr val="1E1E2E"/>
-        </a:solidFill>
-        <a:effectLst/>
-      </p:bgPr>
-    </p:bg>
     <p:spTree>
       <p:nvGrpSpPr>
         <p:cNvPr id="1" name=""/>
@@ -5622,7 +5447,7 @@
             <a:avLst/>
           </a:prstGeom>
           <a:solidFill>
-            <a:srgbClr val="313244"/>
+            <a:schemeClr val="bg1"/>
           </a:solidFill>
           <a:ln>
             <a:noFill/>
@@ -5709,11 +5534,7 @@
           <a:p>
             <a:pPr algn="l"/>
             <a:r>
-              <a:rPr lang="es-AR" sz="1400" b="0" i="0" dirty="0">
-                <a:solidFill>
-                  <a:srgbClr val="FFFFFF"/>
-                </a:solidFill>
-              </a:rPr>
+              <a:rPr lang="es-AR" sz="1400" b="0" i="0" dirty="0"/>
               <a:t>Levanta manualmente una excepción matemática (modo pasivo).</a:t>
             </a:r>
           </a:p>
@@ -5734,7 +5555,7 @@
             <a:avLst/>
           </a:prstGeom>
           <a:solidFill>
-            <a:srgbClr val="313244"/>
+            <a:schemeClr val="bg1"/>
           </a:solidFill>
           <a:ln>
             <a:noFill/>
@@ -5821,11 +5642,7 @@
           <a:p>
             <a:pPr algn="l"/>
             <a:r>
-              <a:rPr lang="es-AR" sz="1400" b="0" i="0" dirty="0">
-                <a:solidFill>
-                  <a:srgbClr val="FFFFFF"/>
-                </a:solidFill>
-              </a:rPr>
+              <a:rPr lang="es-AR" sz="1400" b="0" i="0" dirty="0"/>
               <a:t>Limpia todas las banderas de excepción activas.</a:t>
             </a:r>
           </a:p>
@@ -5846,7 +5663,7 @@
             <a:avLst/>
           </a:prstGeom>
           <a:solidFill>
-            <a:srgbClr val="313244"/>
+            <a:schemeClr val="bg1"/>
           </a:solidFill>
           <a:ln>
             <a:noFill/>
@@ -5933,11 +5750,7 @@
           <a:p>
             <a:pPr algn="l"/>
             <a:r>
-              <a:rPr lang="es-AR" sz="1400" b="0" i="0" dirty="0">
-                <a:solidFill>
-                  <a:srgbClr val="FFFFFF"/>
-                </a:solidFill>
-              </a:rPr>
+              <a:rPr lang="es-AR" sz="1400" b="0" i="0" dirty="0"/>
               <a:t>Consulta si una excepción determinada esta encendida.</a:t>
             </a:r>
           </a:p>
@@ -5958,7 +5771,7 @@
             <a:avLst/>
           </a:prstGeom>
           <a:solidFill>
-            <a:srgbClr val="313244"/>
+            <a:schemeClr val="bg1"/>
           </a:solidFill>
           <a:ln>
             <a:noFill/>
@@ -6045,11 +5858,7 @@
           <a:p>
             <a:pPr algn="l"/>
             <a:r>
-              <a:rPr lang="es-AR" sz="1400" b="0" i="0" dirty="0">
-                <a:solidFill>
-                  <a:srgbClr val="FFFFFF"/>
-                </a:solidFill>
-              </a:rPr>
+              <a:rPr lang="es-AR" sz="1400" b="0" i="0" dirty="0"/>
               <a:t>Activa modo de excepción activa: emite SIGFPE al ocurrir un error.</a:t>
             </a:r>
           </a:p>
@@ -6070,7 +5879,7 @@
             <a:avLst/>
           </a:prstGeom>
           <a:solidFill>
-            <a:srgbClr val="313244"/>
+            <a:schemeClr val="bg1"/>
           </a:solidFill>
           <a:ln>
             <a:noFill/>
@@ -6108,7 +5917,7 @@
         <p:spPr>
           <a:xfrm>
             <a:off x="548640" y="4389120"/>
-            <a:ext cx="2926080" cy="594360"/>
+            <a:ext cx="2926080" cy="323165"/>
           </a:xfrm>
           <a:prstGeom prst="rect">
             <a:avLst/>
@@ -6123,12 +5932,28 @@
           <a:p>
             <a:pPr algn="l"/>
             <a:r>
-              <a:rPr sz="1500" b="1" i="0">
-                <a:solidFill>
-                  <a:srgbClr val="A6E3A1"/>
-                </a:solidFill>
-              </a:rPr>
-              <a:t>signal(SIGFPE, fn)</a:t>
+              <a:rPr sz="1500" b="1" i="0" dirty="0">
+                <a:solidFill>
+                  <a:srgbClr val="00B050"/>
+                </a:solidFill>
+              </a:rPr>
+              <a:t>signal(SIGFPE, </a:t>
+            </a:r>
+            <a:r>
+              <a:rPr sz="1500" b="1" i="0" dirty="0" err="1">
+                <a:solidFill>
+                  <a:srgbClr val="00B050"/>
+                </a:solidFill>
+              </a:rPr>
+              <a:t>fn</a:t>
+            </a:r>
+            <a:r>
+              <a:rPr sz="1500" b="1" i="0" dirty="0">
+                <a:solidFill>
+                  <a:srgbClr val="00B050"/>
+                </a:solidFill>
+              </a:rPr>
+              <a:t>)</a:t>
             </a:r>
           </a:p>
         </p:txBody>
@@ -6157,43 +5982,23 @@
           <a:p>
             <a:pPr algn="l"/>
             <a:r>
-              <a:rPr lang="es-AR" sz="1400" b="0" i="0" dirty="0">
-                <a:solidFill>
-                  <a:srgbClr val="FFFFFF"/>
-                </a:solidFill>
-              </a:rPr>
+              <a:rPr lang="es-AR" sz="1400" b="0" i="0" dirty="0"/>
               <a:t>Registra un </a:t>
             </a:r>
             <a:r>
-              <a:rPr lang="es-AR" sz="1400" b="0" i="0" dirty="0" err="1">
-                <a:solidFill>
-                  <a:srgbClr val="FFFFFF"/>
-                </a:solidFill>
-              </a:rPr>
+              <a:rPr lang="es-AR" sz="1400" b="0" i="0" dirty="0" err="1"/>
               <a:t>handler</a:t>
             </a:r>
             <a:r>
-              <a:rPr lang="es-AR" sz="1400" b="0" i="0" dirty="0">
-                <a:solidFill>
-                  <a:srgbClr val="FFFFFF"/>
-                </a:solidFill>
-              </a:rPr>
+              <a:rPr lang="es-AR" sz="1400" b="0" i="0" dirty="0"/>
               <a:t>. Captura la señal y evita el </a:t>
             </a:r>
             <a:r>
-              <a:rPr lang="es-AR" sz="1400" b="0" i="0" dirty="0" err="1">
-                <a:solidFill>
-                  <a:srgbClr val="FFFFFF"/>
-                </a:solidFill>
-              </a:rPr>
+              <a:rPr lang="es-AR" sz="1400" b="0" i="0" dirty="0" err="1"/>
               <a:t>crash</a:t>
             </a:r>
             <a:r>
-              <a:rPr lang="es-AR" sz="1400" b="0" i="0" dirty="0">
-                <a:solidFill>
-                  <a:srgbClr val="FFFFFF"/>
-                </a:solidFill>
-              </a:rPr>
+              <a:rPr lang="es-AR" sz="1400" b="0" i="0" dirty="0"/>
               <a:t> abrupto.</a:t>
             </a:r>
           </a:p>
@@ -6223,59 +6028,31 @@
           <a:p>
             <a:pPr algn="l"/>
             <a:r>
-              <a:rPr lang="es-AR" sz="1400" b="0" i="1" dirty="0">
-                <a:solidFill>
-                  <a:srgbClr val="BAC2DE"/>
-                </a:solidFill>
-              </a:rPr>
+              <a:rPr lang="es-AR" sz="1400" b="0" i="1" dirty="0"/>
               <a:t>Flujo: </a:t>
             </a:r>
             <a:r>
-              <a:rPr lang="es-AR" sz="1400" b="0" i="1" dirty="0" err="1">
-                <a:solidFill>
-                  <a:srgbClr val="BAC2DE"/>
-                </a:solidFill>
-              </a:rPr>
+              <a:rPr lang="es-AR" sz="1400" b="0" i="1" dirty="0" err="1"/>
               <a:t>feenableexcept</a:t>
             </a:r>
             <a:r>
-              <a:rPr lang="es-AR" sz="1400" b="0" i="1" dirty="0">
-                <a:solidFill>
-                  <a:srgbClr val="BAC2DE"/>
-                </a:solidFill>
-              </a:rPr>
+              <a:rPr lang="es-AR" sz="1400" b="0" i="1" dirty="0"/>
               <a:t> activa alertas -&gt; error matemático dispara SIGFPE -&gt; </a:t>
             </a:r>
             <a:r>
-              <a:rPr lang="es-AR" sz="1400" b="0" i="1" dirty="0" err="1">
-                <a:solidFill>
-                  <a:srgbClr val="BAC2DE"/>
-                </a:solidFill>
-              </a:rPr>
+              <a:rPr lang="es-AR" sz="1400" b="0" i="1" dirty="0" err="1"/>
               <a:t>signal</a:t>
             </a:r>
             <a:r>
-              <a:rPr lang="es-AR" sz="1400" b="0" i="1" dirty="0">
-                <a:solidFill>
-                  <a:srgbClr val="BAC2DE"/>
-                </a:solidFill>
-              </a:rPr>
+              <a:rPr lang="es-AR" sz="1400" b="0" i="1" dirty="0"/>
               <a:t>() redirige a </a:t>
             </a:r>
             <a:r>
-              <a:rPr lang="es-AR" sz="1400" b="0" i="1" dirty="0" err="1">
-                <a:solidFill>
-                  <a:srgbClr val="BAC2DE"/>
-                </a:solidFill>
-              </a:rPr>
+              <a:rPr lang="es-AR" sz="1400" b="0" i="1" dirty="0" err="1"/>
               <a:t>fpe_handler</a:t>
             </a:r>
             <a:r>
-              <a:rPr lang="es-AR" sz="1400" b="0" i="1" dirty="0">
-                <a:solidFill>
-                  <a:srgbClr val="BAC2DE"/>
-                </a:solidFill>
-              </a:rPr>
+              <a:rPr lang="es-AR" sz="1400" b="0" i="1" dirty="0"/>
               <a:t> -&gt; programa termina de forma controlada.</a:t>
             </a:r>
           </a:p>

--- a/Tp3/Ejercicio_6_Presentacion.pptx
+++ b/Tp3/Ejercicio_6_Presentacion.pptx
@@ -3272,34 +3272,7 @@
               <a:rPr sz="2200" b="1" i="0" dirty="0" err="1"/>
               <a:t>Flotante</a:t>
             </a:r>
-            <a:r>
-              <a:rPr sz="2200" b="1" i="0" dirty="0"/>
-              <a:t> y </a:t>
-            </a:r>
-            <a:r>
-              <a:rPr sz="2200" b="1" i="0" dirty="0" err="1"/>
-              <a:t>Manejo</a:t>
-            </a:r>
-            <a:r>
-              <a:rPr sz="2200" b="1" i="0" dirty="0"/>
-              <a:t> de Se</a:t>
-            </a:r>
-            <a:r>
-              <a:rPr lang="es-MX" sz="2200" b="1" dirty="0"/>
-              <a:t>ñ</a:t>
-            </a:r>
-            <a:r>
-              <a:rPr sz="2200" b="1" i="0" dirty="0"/>
-              <a:t>ales </a:t>
-            </a:r>
-            <a:r>
-              <a:rPr sz="2200" b="1" i="0" dirty="0" err="1"/>
-              <a:t>en</a:t>
-            </a:r>
-            <a:r>
-              <a:rPr sz="2200" b="1" i="0" dirty="0"/>
-              <a:t> C</a:t>
-            </a:r>
+            <a:endParaRPr sz="2200" b="1" i="0" dirty="0"/>
           </a:p>
         </p:txBody>
       </p:sp>
